--- a/doc/Ragas 평가/인공지능서비스개발_10조_Ragas.pptx
+++ b/doc/Ragas 평가/인공지능서비스개발_10조_Ragas.pptx
@@ -1,26 +1,25 @@
 
 <file path=ppt/presentation.xml><?xml version="1.0" encoding="utf-8"?>
-<p:presentation xmlns:a="http://schemas.openxmlformats.org/drawingml/2006/main" xmlns:r="http://schemas.openxmlformats.org/officeDocument/2006/relationships" xmlns:p="http://schemas.openxmlformats.org/presentationml/2006/main" xmlns:p14="http://schemas.microsoft.com/office/powerpoint/2010/main" saveSubsetFonts="1" autoCompressPictures="0">
+<p:presentation xmlns:a="http://schemas.openxmlformats.org/drawingml/2006/main" xmlns:r="http://schemas.openxmlformats.org/officeDocument/2006/relationships" xmlns:p="http://schemas.openxmlformats.org/presentationml/2006/main" saveSubsetFonts="1" autoCompressPictures="0">
   <p:sldMasterIdLst>
-    <p:sldMasterId id="2147483654" r:id="rId3"/>
+    <p:sldMasterId id="2147483654" r:id="rId1"/>
   </p:sldMasterIdLst>
   <p:notesMasterIdLst>
-    <p:notesMasterId r:id="rId5"/>
+    <p:notesMasterId r:id="rId12"/>
   </p:notesMasterIdLst>
   <p:sldIdLst>
-    <p:sldId id="256" r:id="rId7"/>
-    <p:sldId id="257" r:id="rId9"/>
-    <p:sldId id="258" r:id="rId11"/>
-    <p:sldId id="259" r:id="rId12"/>
-    <p:sldId id="260" r:id="rId14"/>
-    <p:sldId id="261" r:id="rId16"/>
-    <p:sldId id="262" r:id="rId18"/>
-    <p:sldId id="263" r:id="rId19"/>
-    <p:sldId id="264" r:id="rId20"/>
-    <p:sldId id="265" r:id="rId22"/>
+    <p:sldId id="256" r:id="rId2"/>
+    <p:sldId id="257" r:id="rId3"/>
+    <p:sldId id="258" r:id="rId4"/>
+    <p:sldId id="259" r:id="rId5"/>
+    <p:sldId id="260" r:id="rId6"/>
+    <p:sldId id="261" r:id="rId7"/>
+    <p:sldId id="262" r:id="rId8"/>
+    <p:sldId id="263" r:id="rId9"/>
+    <p:sldId id="264" r:id="rId10"/>
+    <p:sldId id="265" r:id="rId11"/>
   </p:sldIdLst>
-  <p:notesMasterIdLst/>
-  <p:sldSz cx="9144000" cy="5143500"/>
+  <p:sldSz cx="9144000" cy="5143500" type="screen16x9"/>
   <p:notesSz cx="5143500" cy="9144000"/>
   <p:defaultTextStyle>
     <a:lvl1pPr marL="0" algn="l" defTabSz="914400" rtl="0" eaLnBrk="1" latinLnBrk="0" hangingPunct="1">
@@ -114,6 +113,11 @@
       </a:defRPr>
     </a:lvl9pPr>
   </p:defaultTextStyle>
+  <p:extLst>
+    <p:ext uri="{EFAFB233-063F-42B5-8137-9DF3F51BA10A}">
+      <p15:sldGuideLst xmlns:p15="http://schemas.microsoft.com/office/powerpoint/2012/main"/>
+    </p:ext>
+  </p:extLst>
 </p:presentation>
 </file>
 
@@ -199,7 +203,7 @@
           <a:p>
             <a:fld id="{5282F153-3F37-0F45-9E97-73ACFA13230C}" type="datetimeFigureOut">
               <a:rPr lang="en-US"/>
-              <a:t>7/23/19</a:t>
+              <a:t>6/4/2026</a:t>
             </a:fld>
             <a:endParaRPr lang="en-US"/>
           </a:p>
@@ -510,10 +514,6 @@
           <a:bodyPr/>
           <a:lstStyle/>
           <a:p>
-            <a:r>
-              <a:rPr lang="en-US" dirty="0"/>
-              <a:t/>
-            </a:r>
             <a:endParaRPr lang="en-US" dirty="0"/>
           </a:p>
         </p:txBody>
@@ -598,10 +598,6 @@
           <a:bodyPr/>
           <a:lstStyle/>
           <a:p>
-            <a:r>
-              <a:rPr lang="en-US" dirty="0"/>
-              <a:t/>
-            </a:r>
             <a:endParaRPr lang="en-US" dirty="0"/>
           </a:p>
         </p:txBody>
@@ -686,10 +682,6 @@
           <a:bodyPr/>
           <a:lstStyle/>
           <a:p>
-            <a:r>
-              <a:rPr lang="en-US" dirty="0"/>
-              <a:t/>
-            </a:r>
             <a:endParaRPr lang="en-US" dirty="0"/>
           </a:p>
         </p:txBody>
@@ -774,10 +766,6 @@
           <a:bodyPr/>
           <a:lstStyle/>
           <a:p>
-            <a:r>
-              <a:rPr lang="en-US" dirty="0"/>
-              <a:t/>
-            </a:r>
             <a:endParaRPr lang="en-US" dirty="0"/>
           </a:p>
         </p:txBody>
@@ -862,10 +850,6 @@
           <a:bodyPr/>
           <a:lstStyle/>
           <a:p>
-            <a:r>
-              <a:rPr lang="en-US" dirty="0"/>
-              <a:t/>
-            </a:r>
             <a:endParaRPr lang="en-US" dirty="0"/>
           </a:p>
         </p:txBody>
@@ -950,10 +934,6 @@
           <a:bodyPr/>
           <a:lstStyle/>
           <a:p>
-            <a:r>
-              <a:rPr lang="en-US" dirty="0"/>
-              <a:t/>
-            </a:r>
             <a:endParaRPr lang="en-US" dirty="0"/>
           </a:p>
         </p:txBody>
@@ -1038,10 +1018,6 @@
           <a:bodyPr/>
           <a:lstStyle/>
           <a:p>
-            <a:r>
-              <a:rPr lang="en-US" dirty="0"/>
-              <a:t/>
-            </a:r>
             <a:endParaRPr lang="en-US" dirty="0"/>
           </a:p>
         </p:txBody>
@@ -1126,10 +1102,6 @@
           <a:bodyPr/>
           <a:lstStyle/>
           <a:p>
-            <a:r>
-              <a:rPr lang="en-US" dirty="0"/>
-              <a:t/>
-            </a:r>
             <a:endParaRPr lang="en-US" dirty="0"/>
           </a:p>
         </p:txBody>
@@ -1214,10 +1186,6 @@
           <a:bodyPr/>
           <a:lstStyle/>
           <a:p>
-            <a:r>
-              <a:rPr lang="en-US" dirty="0"/>
-              <a:t/>
-            </a:r>
             <a:endParaRPr lang="en-US" dirty="0"/>
           </a:p>
         </p:txBody>
@@ -1302,10 +1270,6 @@
           <a:bodyPr/>
           <a:lstStyle/>
           <a:p>
-            <a:r>
-              <a:rPr lang="en-US" dirty="0"/>
-              <a:t/>
-            </a:r>
             <a:endParaRPr lang="en-US" dirty="0"/>
           </a:p>
         </p:txBody>
@@ -1379,6 +1343,11 @@
 <file path=ppt/slideMasters/slideMaster1.xml><?xml version="1.0" encoding="utf-8"?>
 <p:sldMaster xmlns:a="http://schemas.openxmlformats.org/drawingml/2006/main" xmlns:r="http://schemas.openxmlformats.org/officeDocument/2006/relationships" xmlns:p="http://schemas.openxmlformats.org/presentationml/2006/main">
   <p:cSld>
+    <p:bg>
+      <p:bgRef idx="1001">
+        <a:schemeClr val="bg1"/>
+      </p:bgRef>
+    </p:bg>
     <p:spTree>
       <p:nvGrpSpPr>
         <p:cNvPr id="1" name=""/>
@@ -1654,13 +1623,14 @@
 </file>
 
 <file path=ppt/slides/slide1.xml><?xml version="1.0" encoding="utf-8"?>
-<p:sld xmlns:a="http://schemas.openxmlformats.org/drawingml/2006/main" xmlns:r="http://schemas.openxmlformats.org/officeDocument/2006/relationships" xmlns:p="http://schemas.openxmlformats.org/presentationml/2006/main" xmlns:p14="http://schemas.microsoft.com/office/powerpoint/2010/main">
+<p:sld xmlns:a="http://schemas.openxmlformats.org/drawingml/2006/main" xmlns:r="http://schemas.openxmlformats.org/officeDocument/2006/relationships" xmlns:p="http://schemas.openxmlformats.org/presentationml/2006/main">
   <p:cSld name="Slide 1">
     <p:bg>
       <p:bgPr>
         <a:solidFill>
           <a:srgbClr val="111111"/>
         </a:solidFill>
+        <a:effectLst/>
       </p:bgPr>
     </p:bg>
     <p:spTree>
@@ -1940,7 +1910,7 @@
           <a:bodyPr wrap="square" rtlCol="0" anchor="ctr"/>
           <a:lstStyle/>
           <a:p>
-            <a:pPr algn="ctr" indent="0" marL="0">
+            <a:pPr marL="0" indent="0" algn="ctr">
               <a:buNone/>
             </a:pPr>
             <a:r>
@@ -1957,7 +1927,7 @@
             <a:endParaRPr lang="en-US" sz="2600" dirty="0"/>
           </a:p>
           <a:p>
-            <a:pPr algn="ctr" indent="0" marL="0">
+            <a:pPr marL="0" indent="0" algn="ctr">
               <a:buNone/>
             </a:pPr>
             <a:r>
@@ -1969,7 +1939,40 @@
                 <a:ea typeface="Arial Black" pitchFamily="34" charset="-122"/>
                 <a:cs typeface="Arial Black" pitchFamily="34" charset="-120"/>
               </a:rPr>
-              <a:t>법률 RAG 성능 평가 리포트</a:t>
+              <a:t>법률 RAG </a:t>
+            </a:r>
+            <a:r>
+              <a:rPr lang="en-US" sz="2600" b="1" dirty="0" err="1">
+                <a:solidFill>
+                  <a:srgbClr val="FFFFFF"/>
+                </a:solidFill>
+                <a:latin typeface="Arial Black" pitchFamily="34" charset="0"/>
+                <a:ea typeface="Arial Black" pitchFamily="34" charset="-122"/>
+                <a:cs typeface="Arial Black" pitchFamily="34" charset="-120"/>
+              </a:rPr>
+              <a:t>성능</a:t>
+            </a:r>
+            <a:r>
+              <a:rPr lang="en-US" sz="2600" b="1" dirty="0">
+                <a:solidFill>
+                  <a:srgbClr val="FFFFFF"/>
+                </a:solidFill>
+                <a:latin typeface="Arial Black" pitchFamily="34" charset="0"/>
+                <a:ea typeface="Arial Black" pitchFamily="34" charset="-122"/>
+                <a:cs typeface="Arial Black" pitchFamily="34" charset="-120"/>
+              </a:rPr>
+              <a:t> </a:t>
+            </a:r>
+            <a:r>
+              <a:rPr lang="en-US" sz="2600" b="1" smtClean="0">
+                <a:solidFill>
+                  <a:srgbClr val="FFFFFF"/>
+                </a:solidFill>
+                <a:latin typeface="Arial Black" pitchFamily="34" charset="0"/>
+                <a:ea typeface="Arial Black" pitchFamily="34" charset="-122"/>
+                <a:cs typeface="Arial Black" pitchFamily="34" charset="-120"/>
+              </a:rPr>
+              <a:t>평가</a:t>
             </a:r>
             <a:endParaRPr lang="en-US" sz="2600" dirty="0"/>
           </a:p>
@@ -1996,7 +1999,7 @@
           <a:bodyPr wrap="square" rtlCol="0" anchor="ctr"/>
           <a:lstStyle/>
           <a:p>
-            <a:pPr algn="ctr" indent="0" marL="0">
+            <a:pPr marL="0" indent="0" algn="ctr">
               <a:buNone/>
             </a:pPr>
             <a:r>
@@ -2023,18 +2026,20 @@
           <p:nvPr/>
         </p:nvSpPr>
         <p:spPr>
-          <a:xfrm rot="0">
+          <a:xfrm>
             <a:off x="1369695" y="4039870"/>
             <a:ext cx="6393815" cy="347980"/>
           </a:xfrm>
-          <a:prstGeom prst="rect"/>
+          <a:prstGeom prst="rect">
+            <a:avLst/>
+          </a:prstGeom>
           <a:noFill/>
           <a:ln cap="flat" cmpd="sng">
             <a:prstDash/>
           </a:ln>
         </p:spPr>
         <p:txBody>
-          <a:bodyPr wrap="square" lIns="91440" tIns="45720" rIns="91440" bIns="45720" numCol="1" vert="horz" anchor="ctr">
+          <a:bodyPr vert="horz" wrap="square" lIns="91440" tIns="45720" rIns="91440" bIns="45720" numCol="1" anchor="ctr">
             <a:noAutofit/>
           </a:bodyPr>
           <a:lstStyle/>
@@ -2070,11 +2075,11 @@
   <p:clrMapOvr>
     <a:masterClrMapping/>
   </p:clrMapOvr>
-  <mc:AlternateContent xmlns:mc="http://schemas.openxmlformats.org/markup-compatibility/2006">
-    <mc:Choice xmlns:p14="http://schemas.microsoft.com/office/powerpoint/2010/main" Requires="p14">
+  <mc:AlternateContent xmlns:mc="http://schemas.openxmlformats.org/markup-compatibility/2006" xmlns:p14="http://schemas.microsoft.com/office/powerpoint/2010/main">
+    <mc:Choice Requires="p14">
       <p:transition spd="slow" p14:dur="2000"/>
     </mc:Choice>
-    <mc:Fallback>
+    <mc:Fallback xmlns="">
       <p:transition spd="slow"/>
     </mc:Fallback>
   </mc:AlternateContent>
@@ -2089,13 +2094,14 @@
 </file>
 
 <file path=ppt/slides/slide10.xml><?xml version="1.0" encoding="utf-8"?>
-<p:sld xmlns:a="http://schemas.openxmlformats.org/drawingml/2006/main" xmlns:r="http://schemas.openxmlformats.org/officeDocument/2006/relationships" xmlns:p="http://schemas.openxmlformats.org/presentationml/2006/main" xmlns:p14="http://schemas.microsoft.com/office/powerpoint/2010/main">
+<p:sld xmlns:a="http://schemas.openxmlformats.org/drawingml/2006/main" xmlns:r="http://schemas.openxmlformats.org/officeDocument/2006/relationships" xmlns:p="http://schemas.openxmlformats.org/presentationml/2006/main">
   <p:cSld name="Slide 10">
     <p:bg>
       <p:bgPr>
         <a:solidFill>
           <a:srgbClr val="111111"/>
         </a:solidFill>
+        <a:effectLst/>
       </p:bgPr>
     </p:bg>
     <p:spTree>
@@ -2451,18 +2457,20 @@
           <p:nvPr/>
         </p:nvSpPr>
         <p:spPr>
-          <a:xfrm rot="0">
+          <a:xfrm>
             <a:off x="0" y="2111375"/>
             <a:ext cx="9144635" cy="915035"/>
           </a:xfrm>
-          <a:prstGeom prst="rect"/>
+          <a:prstGeom prst="rect">
+            <a:avLst/>
+          </a:prstGeom>
           <a:noFill/>
           <a:ln cap="flat" cmpd="sng">
             <a:prstDash/>
           </a:ln>
         </p:spPr>
         <p:txBody>
-          <a:bodyPr wrap="square" lIns="91440" tIns="45720" rIns="91440" bIns="45720" numCol="1" vert="horz" anchor="ctr">
+          <a:bodyPr vert="horz" wrap="square" lIns="91440" tIns="45720" rIns="91440" bIns="45720" numCol="1" anchor="ctr">
             <a:noAutofit/>
           </a:bodyPr>
           <a:lstStyle/>
@@ -2472,7 +2480,7 @@
               <a:buNone/>
             </a:pPr>
             <a:r>
-              <a:rPr lang="en-US" sz="4800" spc="1000" b="1">
+              <a:rPr lang="en-US" sz="4800" b="1" spc="1000">
                 <a:solidFill>
                   <a:srgbClr val="FFFFFF"/>
                 </a:solidFill>
@@ -2498,11 +2506,11 @@
   <p:clrMapOvr>
     <a:masterClrMapping/>
   </p:clrMapOvr>
-  <mc:AlternateContent xmlns:mc="http://schemas.openxmlformats.org/markup-compatibility/2006">
-    <mc:Choice xmlns:p14="http://schemas.microsoft.com/office/powerpoint/2010/main" Requires="p14">
+  <mc:AlternateContent xmlns:mc="http://schemas.openxmlformats.org/markup-compatibility/2006" xmlns:p14="http://schemas.microsoft.com/office/powerpoint/2010/main">
+    <mc:Choice Requires="p14">
       <p:transition spd="slow" p14:dur="2000"/>
     </mc:Choice>
-    <mc:Fallback>
+    <mc:Fallback xmlns="">
       <p:transition spd="slow"/>
     </mc:Fallback>
   </mc:AlternateContent>
@@ -2524,6 +2532,7 @@
         <a:solidFill>
           <a:srgbClr val="111111"/>
         </a:solidFill>
+        <a:effectLst/>
       </p:bgPr>
     </p:bg>
     <p:spTree>
@@ -2781,11 +2790,11 @@
           <a:bodyPr wrap="square" rtlCol="0" anchor="ctr"/>
           <a:lstStyle/>
           <a:p>
-            <a:pPr algn="ctr" indent="0" marL="0">
-              <a:buNone/>
-            </a:pPr>
-            <a:r>
-              <a:rPr lang="en-US" sz="3600" b="1" spc="800" kern="0" dirty="0">
+            <a:pPr marL="0" indent="0" algn="ctr">
+              <a:buNone/>
+            </a:pPr>
+            <a:r>
+              <a:rPr lang="en-US" sz="3600" b="1" kern="0" spc="800" dirty="0">
                 <a:solidFill>
                   <a:srgbClr val="FFFFFF"/>
                 </a:solidFill>
@@ -2845,7 +2854,7 @@
           <a:bodyPr wrap="square" rtlCol="0" anchor="ctr"/>
           <a:lstStyle/>
           <a:p>
-            <a:pPr algn="ctr" indent="0" marL="0">
+            <a:pPr marL="0" indent="0" algn="ctr">
               <a:buNone/>
             </a:pPr>
             <a:r>
@@ -2884,7 +2893,7 @@
           <a:bodyPr wrap="square" rtlCol="0" anchor="ctr"/>
           <a:lstStyle/>
           <a:p>
-            <a:pPr algn="l" indent="0" marL="0">
+            <a:pPr marL="0" indent="0" algn="l">
               <a:buNone/>
             </a:pPr>
             <a:r>
@@ -2948,7 +2957,7 @@
           <a:bodyPr wrap="square" rtlCol="0" anchor="ctr"/>
           <a:lstStyle/>
           <a:p>
-            <a:pPr algn="ctr" indent="0" marL="0">
+            <a:pPr marL="0" indent="0" algn="ctr">
               <a:buNone/>
             </a:pPr>
             <a:r>
@@ -2987,7 +2996,7 @@
           <a:bodyPr wrap="square" rtlCol="0" anchor="ctr"/>
           <a:lstStyle/>
           <a:p>
-            <a:pPr algn="l" indent="0" marL="0">
+            <a:pPr marL="0" indent="0" algn="l">
               <a:buNone/>
             </a:pPr>
             <a:r>
@@ -3051,7 +3060,7 @@
           <a:bodyPr wrap="square" rtlCol="0" anchor="ctr"/>
           <a:lstStyle/>
           <a:p>
-            <a:pPr algn="ctr" indent="0" marL="0">
+            <a:pPr marL="0" indent="0" algn="ctr">
               <a:buNone/>
             </a:pPr>
             <a:r>
@@ -3090,7 +3099,7 @@
           <a:bodyPr wrap="square" rtlCol="0" anchor="ctr"/>
           <a:lstStyle/>
           <a:p>
-            <a:pPr algn="l" indent="0" marL="0">
+            <a:pPr marL="0" indent="0" algn="l">
               <a:buNone/>
             </a:pPr>
             <a:r>
@@ -3154,7 +3163,7 @@
           <a:bodyPr wrap="square" rtlCol="0" anchor="ctr"/>
           <a:lstStyle/>
           <a:p>
-            <a:pPr algn="ctr" indent="0" marL="0">
+            <a:pPr marL="0" indent="0" algn="ctr">
               <a:buNone/>
             </a:pPr>
             <a:r>
@@ -3193,7 +3202,7 @@
           <a:bodyPr wrap="square" rtlCol="0" anchor="ctr"/>
           <a:lstStyle/>
           <a:p>
-            <a:pPr algn="l" indent="0" marL="0">
+            <a:pPr marL="0" indent="0" algn="l">
               <a:buNone/>
             </a:pPr>
             <a:r>
@@ -3257,7 +3266,7 @@
           <a:bodyPr wrap="square" rtlCol="0" anchor="ctr"/>
           <a:lstStyle/>
           <a:p>
-            <a:pPr algn="ctr" indent="0" marL="0">
+            <a:pPr marL="0" indent="0" algn="ctr">
               <a:buNone/>
             </a:pPr>
             <a:r>
@@ -3296,7 +3305,7 @@
           <a:bodyPr wrap="square" rtlCol="0" anchor="ctr"/>
           <a:lstStyle/>
           <a:p>
-            <a:pPr algn="l" indent="0" marL="0">
+            <a:pPr marL="0" indent="0" algn="l">
               <a:buNone/>
             </a:pPr>
             <a:r>
@@ -3360,7 +3369,7 @@
           <a:bodyPr wrap="square" rtlCol="0" anchor="ctr"/>
           <a:lstStyle/>
           <a:p>
-            <a:pPr algn="ctr" indent="0" marL="0">
+            <a:pPr marL="0" indent="0" algn="ctr">
               <a:buNone/>
             </a:pPr>
             <a:r>
@@ -3399,7 +3408,7 @@
           <a:bodyPr wrap="square" rtlCol="0" anchor="ctr"/>
           <a:lstStyle/>
           <a:p>
-            <a:pPr algn="l" indent="0" marL="0">
+            <a:pPr marL="0" indent="0" algn="l">
               <a:buNone/>
             </a:pPr>
             <a:r>
@@ -3426,13 +3435,14 @@
 </file>
 
 <file path=ppt/slides/slide3.xml><?xml version="1.0" encoding="utf-8"?>
-<p:sld xmlns:a="http://schemas.openxmlformats.org/drawingml/2006/main" xmlns:r="http://schemas.openxmlformats.org/officeDocument/2006/relationships" xmlns:p="http://schemas.openxmlformats.org/presentationml/2006/main" xmlns:p14="http://schemas.microsoft.com/office/powerpoint/2010/main">
+<p:sld xmlns:a="http://schemas.openxmlformats.org/drawingml/2006/main" xmlns:r="http://schemas.openxmlformats.org/officeDocument/2006/relationships" xmlns:p="http://schemas.openxmlformats.org/presentationml/2006/main">
   <p:cSld name="Slide 3">
     <p:bg>
       <p:bgPr>
         <a:solidFill>
           <a:srgbClr val="F2F2F2"/>
         </a:solidFill>
+        <a:effectLst/>
       </p:bgPr>
     </p:bg>
     <p:spTree>
@@ -3715,7 +3725,7 @@
           <a:bodyPr wrap="square" rtlCol="0" anchor="ctr"/>
           <a:lstStyle/>
           <a:p>
-            <a:pPr algn="ctr" indent="0" marL="0">
+            <a:pPr marL="0" indent="0" algn="ctr">
               <a:buNone/>
             </a:pPr>
             <a:r>
@@ -3754,7 +3764,7 @@
           <a:bodyPr wrap="square" rtlCol="0" anchor="ctr"/>
           <a:lstStyle/>
           <a:p>
-            <a:pPr algn="l" indent="0" marL="0">
+            <a:pPr marL="0" indent="0" algn="l">
               <a:buNone/>
             </a:pPr>
             <a:r>
@@ -3793,7 +3803,7 @@
           <a:bodyPr wrap="square" rtlCol="0" anchor="ctr"/>
           <a:lstStyle/>
           <a:p>
-            <a:pPr algn="l" indent="0" marL="0">
+            <a:pPr marL="0" indent="0" algn="l">
               <a:buNone/>
             </a:pPr>
             <a:r>
@@ -3857,7 +3867,7 @@
           <a:bodyPr wrap="square" rtlCol="0" anchor="ctr"/>
           <a:lstStyle/>
           <a:p>
-            <a:pPr algn="ctr" indent="0" marL="0">
+            <a:pPr marL="0" indent="0" algn="ctr">
               <a:buNone/>
             </a:pPr>
             <a:r>
@@ -3921,7 +3931,7 @@
           <a:bodyPr wrap="square" rtlCol="0" anchor="ctr"/>
           <a:lstStyle/>
           <a:p>
-            <a:pPr algn="ctr" indent="0" marL="0">
+            <a:pPr marL="0" indent="0" algn="ctr">
               <a:buNone/>
             </a:pPr>
             <a:r>
@@ -3985,7 +3995,7 @@
           <a:bodyPr wrap="square" rtlCol="0" anchor="ctr"/>
           <a:lstStyle/>
           <a:p>
-            <a:pPr algn="ctr" indent="0" marL="0">
+            <a:pPr marL="0" indent="0" algn="ctr">
               <a:buNone/>
             </a:pPr>
             <a:r>
@@ -4049,7 +4059,7 @@
           <a:bodyPr wrap="square" rtlCol="0" anchor="ctr"/>
           <a:lstStyle/>
           <a:p>
-            <a:pPr algn="ctr" indent="0" marL="0">
+            <a:pPr marL="0" indent="0" algn="ctr">
               <a:buNone/>
             </a:pPr>
             <a:r>
@@ -4188,7 +4198,7 @@
           <a:bodyPr wrap="square" rtlCol="0" anchor="ctr"/>
           <a:lstStyle/>
           <a:p>
-            <a:pPr algn="ctr" indent="0" marL="0">
+            <a:pPr marL="0" indent="0" algn="ctr">
               <a:buNone/>
             </a:pPr>
             <a:r>
@@ -4227,7 +4237,7 @@
           <a:bodyPr wrap="square" rtlCol="0" anchor="ctr"/>
           <a:lstStyle/>
           <a:p>
-            <a:pPr algn="l" indent="0" marL="0">
+            <a:pPr marL="0" indent="0" algn="l">
               <a:buNone/>
             </a:pPr>
             <a:r>
@@ -4266,7 +4276,7 @@
           <a:bodyPr wrap="square" rtlCol="0" anchor="ctr"/>
           <a:lstStyle/>
           <a:p>
-            <a:pPr algn="l" indent="0" marL="0">
+            <a:pPr marL="0" indent="0" algn="l">
               <a:buNone/>
             </a:pPr>
             <a:r>
@@ -4305,7 +4315,7 @@
           <a:bodyPr wrap="square" rtlCol="0" anchor="ctr"/>
           <a:lstStyle/>
           <a:p>
-            <a:pPr algn="ctr" indent="0" marL="0">
+            <a:pPr marL="0" indent="0" algn="ctr">
               <a:buNone/>
             </a:pPr>
             <a:r>
@@ -4444,7 +4454,7 @@
           <a:bodyPr wrap="square" rtlCol="0" anchor="ctr"/>
           <a:lstStyle/>
           <a:p>
-            <a:pPr algn="ctr" indent="0" marL="0">
+            <a:pPr marL="0" indent="0" algn="ctr">
               <a:buNone/>
             </a:pPr>
             <a:r>
@@ -4483,7 +4493,7 @@
           <a:bodyPr wrap="square" rtlCol="0" anchor="ctr"/>
           <a:lstStyle/>
           <a:p>
-            <a:pPr algn="l" indent="0" marL="0">
+            <a:pPr marL="0" indent="0" algn="l">
               <a:buNone/>
             </a:pPr>
             <a:r>
@@ -4522,7 +4532,7 @@
           <a:bodyPr wrap="square" rtlCol="0" anchor="ctr"/>
           <a:lstStyle/>
           <a:p>
-            <a:pPr algn="l" indent="0" marL="0">
+            <a:pPr marL="0" indent="0" algn="l">
               <a:buNone/>
             </a:pPr>
             <a:r>
@@ -4561,7 +4571,7 @@
           <a:bodyPr wrap="square" rtlCol="0" anchor="ctr"/>
           <a:lstStyle/>
           <a:p>
-            <a:pPr algn="ctr" indent="0" marL="0">
+            <a:pPr marL="0" indent="0" algn="ctr">
               <a:buNone/>
             </a:pPr>
             <a:r>
@@ -4700,7 +4710,7 @@
           <a:bodyPr wrap="square" rtlCol="0" anchor="ctr"/>
           <a:lstStyle/>
           <a:p>
-            <a:pPr algn="ctr" indent="0" marL="0">
+            <a:pPr marL="0" indent="0" algn="ctr">
               <a:buNone/>
             </a:pPr>
             <a:r>
@@ -4739,7 +4749,7 @@
           <a:bodyPr wrap="square" rtlCol="0" anchor="ctr"/>
           <a:lstStyle/>
           <a:p>
-            <a:pPr algn="l" indent="0" marL="0">
+            <a:pPr marL="0" indent="0" algn="l">
               <a:buNone/>
             </a:pPr>
             <a:r>
@@ -4778,7 +4788,7 @@
           <a:bodyPr wrap="square" rtlCol="0" anchor="ctr"/>
           <a:lstStyle/>
           <a:p>
-            <a:pPr algn="l" indent="0" marL="0">
+            <a:pPr marL="0" indent="0" algn="l">
               <a:buNone/>
             </a:pPr>
             <a:r>
@@ -4817,7 +4827,7 @@
           <a:bodyPr wrap="square" rtlCol="0" anchor="ctr"/>
           <a:lstStyle/>
           <a:p>
-            <a:pPr algn="ctr" indent="0" marL="0">
+            <a:pPr marL="0" indent="0" algn="ctr">
               <a:buNone/>
             </a:pPr>
             <a:r>
@@ -4956,7 +4966,7 @@
           <a:bodyPr wrap="square" rtlCol="0" anchor="ctr"/>
           <a:lstStyle/>
           <a:p>
-            <a:pPr algn="ctr" indent="0" marL="0">
+            <a:pPr marL="0" indent="0" algn="ctr">
               <a:buNone/>
             </a:pPr>
             <a:r>
@@ -4995,7 +5005,7 @@
           <a:bodyPr wrap="square" rtlCol="0" anchor="ctr"/>
           <a:lstStyle/>
           <a:p>
-            <a:pPr algn="l" indent="0" marL="0">
+            <a:pPr marL="0" indent="0" algn="l">
               <a:buNone/>
             </a:pPr>
             <a:r>
@@ -5034,7 +5044,7 @@
           <a:bodyPr wrap="square" rtlCol="0" anchor="ctr"/>
           <a:lstStyle/>
           <a:p>
-            <a:pPr algn="l" indent="0" marL="0">
+            <a:pPr marL="0" indent="0" algn="l">
               <a:buNone/>
             </a:pPr>
             <a:r>
@@ -5073,7 +5083,7 @@
           <a:bodyPr wrap="square" rtlCol="0" anchor="ctr"/>
           <a:lstStyle/>
           <a:p>
-            <a:pPr algn="ctr" indent="0" marL="0">
+            <a:pPr marL="0" indent="0" algn="ctr">
               <a:buNone/>
             </a:pPr>
             <a:r>
@@ -5125,11 +5135,13 @@
           <p:nvPr/>
         </p:nvSpPr>
         <p:spPr>
-          <a:xfrm rot="0">
+          <a:xfrm>
             <a:off x="687070" y="2520315"/>
             <a:ext cx="3960495" cy="302895"/>
           </a:xfrm>
-          <a:prstGeom prst="rect"/>
+          <a:prstGeom prst="rect">
+            <a:avLst/>
+          </a:prstGeom>
           <a:solidFill>
             <a:srgbClr val="E8E8E8"/>
           </a:solidFill>
@@ -5143,7 +5155,7 @@
           </a:ln>
         </p:spPr>
         <p:txBody>
-          <a:bodyPr wrap="square" lIns="0" tIns="0" rIns="0" bIns="0" numCol="1" vert="horz" anchor="t">
+          <a:bodyPr vert="horz" wrap="square" lIns="0" tIns="0" rIns="0" bIns="0" numCol="1" anchor="t">
             <a:noAutofit/>
           </a:bodyPr>
           <a:lstStyle/>
@@ -5227,7 +5239,7 @@
           <a:bodyPr wrap="square" rtlCol="0" anchor="ctr"/>
           <a:lstStyle/>
           <a:p>
-            <a:pPr algn="ctr" indent="0" marL="0">
+            <a:pPr marL="0" indent="0" algn="ctr">
               <a:buNone/>
             </a:pPr>
             <a:r>
@@ -5266,7 +5278,7 @@
           <a:bodyPr wrap="square" rtlCol="0" anchor="ctr"/>
           <a:lstStyle/>
           <a:p>
-            <a:pPr algn="l" indent="0" marL="0">
+            <a:pPr marL="0" indent="0" algn="l">
               <a:buNone/>
             </a:pPr>
             <a:r>
@@ -5305,7 +5317,7 @@
           <a:bodyPr wrap="square" rtlCol="0" anchor="ctr"/>
           <a:lstStyle/>
           <a:p>
-            <a:pPr algn="l" indent="0" marL="0">
+            <a:pPr marL="0" indent="0" algn="l">
               <a:buNone/>
             </a:pPr>
             <a:r>
@@ -5344,7 +5356,7 @@
           <a:bodyPr wrap="square" rtlCol="0" anchor="ctr"/>
           <a:lstStyle/>
           <a:p>
-            <a:pPr algn="ctr" indent="0" marL="0">
+            <a:pPr marL="0" indent="0" algn="ctr">
               <a:buNone/>
             </a:pPr>
             <a:r>
@@ -5483,7 +5495,7 @@
           <a:bodyPr wrap="square" rtlCol="0" anchor="ctr"/>
           <a:lstStyle/>
           <a:p>
-            <a:pPr algn="ctr" indent="0" marL="0">
+            <a:pPr marL="0" indent="0" algn="ctr">
               <a:buNone/>
             </a:pPr>
             <a:r>
@@ -5522,7 +5534,7 @@
           <a:bodyPr wrap="square" rtlCol="0" anchor="ctr"/>
           <a:lstStyle/>
           <a:p>
-            <a:pPr algn="l" indent="0" marL="0">
+            <a:pPr marL="0" indent="0" algn="l">
               <a:buNone/>
             </a:pPr>
             <a:r>
@@ -5561,7 +5573,7 @@
           <a:bodyPr wrap="square" rtlCol="0" anchor="ctr"/>
           <a:lstStyle/>
           <a:p>
-            <a:pPr algn="l" indent="0" marL="0">
+            <a:pPr marL="0" indent="0" algn="l">
               <a:buNone/>
             </a:pPr>
             <a:r>
@@ -5600,7 +5612,7 @@
           <a:bodyPr wrap="square" rtlCol="0" anchor="ctr"/>
           <a:lstStyle/>
           <a:p>
-            <a:pPr algn="ctr" indent="0" marL="0">
+            <a:pPr marL="0" indent="0" algn="ctr">
               <a:buNone/>
             </a:pPr>
             <a:r>
@@ -5739,7 +5751,7 @@
           <a:bodyPr wrap="square" rtlCol="0" anchor="ctr"/>
           <a:lstStyle/>
           <a:p>
-            <a:pPr algn="ctr" indent="0" marL="0">
+            <a:pPr marL="0" indent="0" algn="ctr">
               <a:buNone/>
             </a:pPr>
             <a:r>
@@ -5778,7 +5790,7 @@
           <a:bodyPr wrap="square" rtlCol="0" anchor="ctr"/>
           <a:lstStyle/>
           <a:p>
-            <a:pPr algn="l" indent="0" marL="0">
+            <a:pPr marL="0" indent="0" algn="l">
               <a:buNone/>
             </a:pPr>
             <a:r>
@@ -5817,7 +5829,7 @@
           <a:bodyPr wrap="square" rtlCol="0" anchor="ctr"/>
           <a:lstStyle/>
           <a:p>
-            <a:pPr algn="l" indent="0" marL="0">
+            <a:pPr marL="0" indent="0" algn="l">
               <a:buNone/>
             </a:pPr>
             <a:r>
@@ -5856,7 +5868,7 @@
           <a:bodyPr wrap="square" rtlCol="0" anchor="ctr"/>
           <a:lstStyle/>
           <a:p>
-            <a:pPr algn="ctr" indent="0" marL="0">
+            <a:pPr marL="0" indent="0" algn="ctr">
               <a:buNone/>
             </a:pPr>
             <a:r>
@@ -5995,7 +6007,7 @@
           <a:bodyPr wrap="square" rtlCol="0" anchor="ctr"/>
           <a:lstStyle/>
           <a:p>
-            <a:pPr algn="ctr" indent="0" marL="0">
+            <a:pPr marL="0" indent="0" algn="ctr">
               <a:buNone/>
             </a:pPr>
             <a:r>
@@ -6034,7 +6046,7 @@
           <a:bodyPr wrap="square" rtlCol="0" anchor="ctr"/>
           <a:lstStyle/>
           <a:p>
-            <a:pPr algn="l" indent="0" marL="0">
+            <a:pPr marL="0" indent="0" algn="l">
               <a:buNone/>
             </a:pPr>
             <a:r>
@@ -6073,7 +6085,7 @@
           <a:bodyPr wrap="square" rtlCol="0" anchor="ctr"/>
           <a:lstStyle/>
           <a:p>
-            <a:pPr algn="l" indent="0" marL="0">
+            <a:pPr marL="0" indent="0" algn="l">
               <a:buNone/>
             </a:pPr>
             <a:r>
@@ -6112,7 +6124,7 @@
           <a:bodyPr wrap="square" rtlCol="0" anchor="ctr"/>
           <a:lstStyle/>
           <a:p>
-            <a:pPr algn="ctr" indent="0" marL="0">
+            <a:pPr marL="0" indent="0" algn="ctr">
               <a:buNone/>
             </a:pPr>
             <a:r>
@@ -6251,7 +6263,7 @@
           <a:bodyPr wrap="square" rtlCol="0" anchor="ctr"/>
           <a:lstStyle/>
           <a:p>
-            <a:pPr algn="ctr" indent="0" marL="0">
+            <a:pPr marL="0" indent="0" algn="ctr">
               <a:buNone/>
             </a:pPr>
             <a:r>
@@ -6290,7 +6302,7 @@
           <a:bodyPr wrap="square" rtlCol="0" anchor="ctr"/>
           <a:lstStyle/>
           <a:p>
-            <a:pPr algn="l" indent="0" marL="0">
+            <a:pPr marL="0" indent="0" algn="l">
               <a:buNone/>
             </a:pPr>
             <a:r>
@@ -6329,7 +6341,7 @@
           <a:bodyPr wrap="square" rtlCol="0" anchor="ctr"/>
           <a:lstStyle/>
           <a:p>
-            <a:pPr algn="l" indent="0" marL="0">
+            <a:pPr marL="0" indent="0" algn="l">
               <a:buNone/>
             </a:pPr>
             <a:r>
@@ -6368,7 +6380,7 @@
           <a:bodyPr wrap="square" rtlCol="0" anchor="ctr"/>
           <a:lstStyle/>
           <a:p>
-            <a:pPr algn="ctr" indent="0" marL="0">
+            <a:pPr marL="0" indent="0" algn="ctr">
               <a:buNone/>
             </a:pPr>
             <a:r>
@@ -6507,7 +6519,7 @@
           <a:bodyPr wrap="square" rtlCol="0" anchor="ctr"/>
           <a:lstStyle/>
           <a:p>
-            <a:pPr algn="ctr" indent="0" marL="0">
+            <a:pPr marL="0" indent="0" algn="ctr">
               <a:buNone/>
             </a:pPr>
             <a:r>
@@ -6546,7 +6558,7 @@
           <a:bodyPr wrap="square" rtlCol="0" anchor="ctr"/>
           <a:lstStyle/>
           <a:p>
-            <a:pPr algn="l" indent="0" marL="0">
+            <a:pPr marL="0" indent="0" algn="l">
               <a:buNone/>
             </a:pPr>
             <a:r>
@@ -6585,7 +6597,7 @@
           <a:bodyPr wrap="square" rtlCol="0" anchor="ctr"/>
           <a:lstStyle/>
           <a:p>
-            <a:pPr algn="l" indent="0" marL="0">
+            <a:pPr marL="0" indent="0" algn="l">
               <a:buNone/>
             </a:pPr>
             <a:r>
@@ -6624,7 +6636,7 @@
           <a:bodyPr wrap="square" rtlCol="0" anchor="ctr"/>
           <a:lstStyle/>
           <a:p>
-            <a:pPr algn="ctr" indent="0" marL="0">
+            <a:pPr marL="0" indent="0" algn="ctr">
               <a:buNone/>
             </a:pPr>
             <a:r>
@@ -6763,7 +6775,7 @@
           <a:bodyPr wrap="square" rtlCol="0" anchor="ctr"/>
           <a:lstStyle/>
           <a:p>
-            <a:pPr algn="ctr" indent="0" marL="0">
+            <a:pPr marL="0" indent="0" algn="ctr">
               <a:buNone/>
             </a:pPr>
             <a:r>
@@ -6802,7 +6814,7 @@
           <a:bodyPr wrap="square" rtlCol="0" anchor="ctr"/>
           <a:lstStyle/>
           <a:p>
-            <a:pPr algn="l" indent="0" marL="0">
+            <a:pPr marL="0" indent="0" algn="l">
               <a:buNone/>
             </a:pPr>
             <a:r>
@@ -6841,7 +6853,7 @@
           <a:bodyPr wrap="square" rtlCol="0" anchor="ctr"/>
           <a:lstStyle/>
           <a:p>
-            <a:pPr algn="l" indent="0" marL="0">
+            <a:pPr marL="0" indent="0" algn="l">
               <a:buNone/>
             </a:pPr>
             <a:r>
@@ -6880,7 +6892,7 @@
           <a:bodyPr wrap="square" rtlCol="0" anchor="ctr"/>
           <a:lstStyle/>
           <a:p>
-            <a:pPr algn="ctr" indent="0" marL="0">
+            <a:pPr marL="0" indent="0" algn="ctr">
               <a:buNone/>
             </a:pPr>
             <a:r>
@@ -7019,7 +7031,7 @@
           <a:bodyPr wrap="square" rtlCol="0" anchor="ctr"/>
           <a:lstStyle/>
           <a:p>
-            <a:pPr algn="ctr" indent="0" marL="0">
+            <a:pPr marL="0" indent="0" algn="ctr">
               <a:buNone/>
             </a:pPr>
             <a:r>
@@ -7058,7 +7070,7 @@
           <a:bodyPr wrap="square" rtlCol="0" anchor="ctr"/>
           <a:lstStyle/>
           <a:p>
-            <a:pPr algn="l" indent="0" marL="0">
+            <a:pPr marL="0" indent="0" algn="l">
               <a:buNone/>
             </a:pPr>
             <a:r>
@@ -7097,7 +7109,7 @@
           <a:bodyPr wrap="square" rtlCol="0" anchor="ctr"/>
           <a:lstStyle/>
           <a:p>
-            <a:pPr algn="l" indent="0" marL="0">
+            <a:pPr marL="0" indent="0" algn="l">
               <a:buNone/>
             </a:pPr>
             <a:r>
@@ -7136,7 +7148,7 @@
           <a:bodyPr wrap="square" rtlCol="0" anchor="ctr"/>
           <a:lstStyle/>
           <a:p>
-            <a:pPr algn="ctr" indent="0" marL="0">
+            <a:pPr marL="0" indent="0" algn="ctr">
               <a:buNone/>
             </a:pPr>
             <a:r>
@@ -7159,11 +7171,11 @@
   <p:clrMapOvr>
     <a:masterClrMapping/>
   </p:clrMapOvr>
-  <mc:AlternateContent xmlns:mc="http://schemas.openxmlformats.org/markup-compatibility/2006">
-    <mc:Choice xmlns:p14="http://schemas.microsoft.com/office/powerpoint/2010/main" Requires="p14">
+  <mc:AlternateContent xmlns:mc="http://schemas.openxmlformats.org/markup-compatibility/2006" xmlns:p14="http://schemas.microsoft.com/office/powerpoint/2010/main">
+    <mc:Choice Requires="p14">
       <p:transition spd="slow" p14:dur="2000"/>
     </mc:Choice>
-    <mc:Fallback>
+    <mc:Fallback xmlns="">
       <p:transition spd="slow"/>
     </mc:Fallback>
   </mc:AlternateContent>
@@ -7178,13 +7190,14 @@
 </file>
 
 <file path=ppt/slides/slide4.xml><?xml version="1.0" encoding="utf-8"?>
-<p:sld xmlns:a="http://schemas.openxmlformats.org/drawingml/2006/main" xmlns:r="http://schemas.openxmlformats.org/officeDocument/2006/relationships" xmlns:p="http://schemas.openxmlformats.org/presentationml/2006/main" xmlns:p14="http://schemas.microsoft.com/office/powerpoint/2010/main">
+<p:sld xmlns:a="http://schemas.openxmlformats.org/drawingml/2006/main" xmlns:r="http://schemas.openxmlformats.org/officeDocument/2006/relationships" xmlns:p="http://schemas.openxmlformats.org/presentationml/2006/main">
   <p:cSld name="Slide 4">
     <p:bg>
       <p:bgPr>
         <a:solidFill>
           <a:srgbClr val="111111"/>
         </a:solidFill>
+        <a:effectLst/>
       </p:bgPr>
     </p:bg>
     <p:spTree>
@@ -7467,7 +7480,7 @@
           <a:bodyPr wrap="square" rtlCol="0" anchor="ctr"/>
           <a:lstStyle/>
           <a:p>
-            <a:pPr algn="ctr" indent="0" marL="0">
+            <a:pPr marL="0" indent="0" algn="ctr">
               <a:buNone/>
             </a:pPr>
             <a:r>
@@ -7506,7 +7519,7 @@
           <a:bodyPr wrap="square" rtlCol="0" anchor="ctr"/>
           <a:lstStyle/>
           <a:p>
-            <a:pPr algn="l" indent="0" marL="0">
+            <a:pPr marL="0" indent="0" algn="l">
               <a:buNone/>
             </a:pPr>
             <a:r>
@@ -7545,7 +7558,7 @@
           <a:bodyPr wrap="square" rtlCol="0" anchor="ctr"/>
           <a:lstStyle/>
           <a:p>
-            <a:pPr algn="l" indent="0" marL="0">
+            <a:pPr marL="0" indent="0" algn="l">
               <a:buNone/>
             </a:pPr>
             <a:r>
@@ -7609,7 +7622,7 @@
           <a:bodyPr wrap="square" rtlCol="0" anchor="ctr"/>
           <a:lstStyle/>
           <a:p>
-            <a:pPr algn="ctr" indent="0" marL="0">
+            <a:pPr marL="0" indent="0" algn="ctr">
               <a:buNone/>
             </a:pPr>
             <a:r>
@@ -7626,7 +7639,7 @@
             <a:endParaRPr lang="en-US" sz="1000" dirty="0"/>
           </a:p>
           <a:p>
-            <a:pPr algn="ctr" indent="0" marL="0">
+            <a:pPr marL="0" indent="0" algn="ctr">
               <a:buNone/>
             </a:pPr>
             <a:r>
@@ -7676,18 +7689,20 @@
           <p:nvPr/>
         </p:nvSpPr>
         <p:spPr>
-          <a:xfrm rot="0">
+          <a:xfrm>
             <a:off x="2240280" y="1417320"/>
             <a:ext cx="274955" cy="366395"/>
           </a:xfrm>
-          <a:prstGeom prst="rect"/>
+          <a:prstGeom prst="rect">
+            <a:avLst/>
+          </a:prstGeom>
           <a:noFill/>
           <a:ln cap="flat" cmpd="sng">
             <a:prstDash/>
           </a:ln>
         </p:spPr>
         <p:txBody>
-          <a:bodyPr wrap="square" lIns="91440" tIns="45720" rIns="91440" bIns="45720" numCol="1" vert="horz" anchor="ctr">
+          <a:bodyPr vert="horz" wrap="square" lIns="91440" tIns="45720" rIns="91440" bIns="45720" numCol="1" anchor="ctr">
             <a:noAutofit/>
           </a:bodyPr>
           <a:lstStyle/>
@@ -7758,7 +7773,7 @@
           <a:bodyPr wrap="square" rtlCol="0" anchor="ctr"/>
           <a:lstStyle/>
           <a:p>
-            <a:pPr algn="ctr" indent="0" marL="0">
+            <a:pPr marL="0" indent="0" algn="ctr">
               <a:buNone/>
             </a:pPr>
             <a:r>
@@ -7775,7 +7790,7 @@
             <a:endParaRPr lang="en-US" sz="1000" dirty="0"/>
           </a:p>
           <a:p>
-            <a:pPr algn="ctr" indent="0" marL="0">
+            <a:pPr marL="0" indent="0" algn="ctr">
               <a:buNone/>
             </a:pPr>
             <a:r>
@@ -7837,7 +7852,7 @@
           <a:bodyPr wrap="square" rtlCol="0" anchor="ctr"/>
           <a:lstStyle/>
           <a:p>
-            <a:pPr algn="ctr" indent="0" marL="0">
+            <a:pPr marL="0" indent="0" algn="ctr">
               <a:buNone/>
             </a:pPr>
             <a:r>
@@ -7898,7 +7913,7 @@
           <a:bodyPr wrap="square" rtlCol="0" anchor="ctr"/>
           <a:lstStyle/>
           <a:p>
-            <a:pPr algn="ctr" indent="0" marL="0">
+            <a:pPr marL="0" indent="0" algn="ctr">
               <a:buNone/>
             </a:pPr>
             <a:r>
@@ -7915,7 +7930,7 @@
             <a:endParaRPr lang="en-US" sz="1000" dirty="0"/>
           </a:p>
           <a:p>
-            <a:pPr algn="ctr" indent="0" marL="0">
+            <a:pPr marL="0" indent="0" algn="ctr">
               <a:buNone/>
             </a:pPr>
             <a:r>
@@ -7977,7 +7992,7 @@
           <a:bodyPr wrap="square" rtlCol="0" anchor="ctr"/>
           <a:lstStyle/>
           <a:p>
-            <a:pPr algn="ctr" indent="0" marL="0">
+            <a:pPr marL="0" indent="0" algn="ctr">
               <a:buNone/>
             </a:pPr>
             <a:r>
@@ -8038,7 +8053,7 @@
           <a:bodyPr wrap="square" rtlCol="0" anchor="ctr"/>
           <a:lstStyle/>
           <a:p>
-            <a:pPr algn="ctr" indent="0" marL="0">
+            <a:pPr marL="0" indent="0" algn="ctr">
               <a:buNone/>
             </a:pPr>
             <a:r>
@@ -8055,7 +8070,7 @@
             <a:endParaRPr lang="en-US" sz="1000" dirty="0"/>
           </a:p>
           <a:p>
-            <a:pPr algn="ctr" indent="0" marL="0">
+            <a:pPr marL="0" indent="0" algn="ctr">
               <a:buNone/>
             </a:pPr>
             <a:r>
@@ -8144,7 +8159,7 @@
           <a:bodyPr wrap="square" rtlCol="0" anchor="ctr"/>
           <a:lstStyle/>
           <a:p>
-            <a:pPr algn="l" indent="0" marL="0">
+            <a:pPr marL="0" indent="0" algn="l">
               <a:buNone/>
             </a:pPr>
             <a:r>
@@ -8183,7 +8198,7 @@
           <a:bodyPr wrap="square" rtlCol="0" anchor="ctr"/>
           <a:lstStyle/>
           <a:p>
-            <a:pPr algn="l" indent="0" marL="0">
+            <a:pPr marL="0" indent="0" algn="l">
               <a:buNone/>
             </a:pPr>
             <a:r>
@@ -8200,7 +8215,7 @@
             <a:endParaRPr lang="en-US" sz="900" dirty="0"/>
           </a:p>
           <a:p>
-            <a:pPr algn="l" indent="0" marL="0">
+            <a:pPr marL="0" indent="0" algn="l">
               <a:buNone/>
             </a:pPr>
             <a:r>
@@ -8289,7 +8304,7 @@
           <a:bodyPr wrap="square" rtlCol="0" anchor="ctr"/>
           <a:lstStyle/>
           <a:p>
-            <a:pPr algn="l" indent="0" marL="0">
+            <a:pPr marL="0" indent="0" algn="l">
               <a:buNone/>
             </a:pPr>
             <a:r>
@@ -8328,7 +8343,7 @@
           <a:bodyPr wrap="square" rtlCol="0" anchor="ctr"/>
           <a:lstStyle/>
           <a:p>
-            <a:pPr algn="l" indent="0" marL="0">
+            <a:pPr marL="0" indent="0" algn="l">
               <a:buNone/>
             </a:pPr>
             <a:r>
@@ -8345,7 +8360,7 @@
             <a:endParaRPr lang="en-US" sz="900" dirty="0"/>
           </a:p>
           <a:p>
-            <a:pPr algn="l" indent="0" marL="0">
+            <a:pPr marL="0" indent="0" algn="l">
               <a:buNone/>
             </a:pPr>
             <a:r>
@@ -8434,7 +8449,7 @@
           <a:bodyPr wrap="square" rtlCol="0" anchor="ctr"/>
           <a:lstStyle/>
           <a:p>
-            <a:pPr algn="l" indent="0" marL="0">
+            <a:pPr marL="0" indent="0" algn="l">
               <a:buNone/>
             </a:pPr>
             <a:r>
@@ -8473,7 +8488,7 @@
           <a:bodyPr wrap="square" rtlCol="0" anchor="ctr"/>
           <a:lstStyle/>
           <a:p>
-            <a:pPr algn="l" indent="0" marL="0">
+            <a:pPr marL="0" indent="0" algn="l">
               <a:buNone/>
             </a:pPr>
             <a:r>
@@ -8490,7 +8505,7 @@
             <a:endParaRPr lang="en-US" sz="900" dirty="0"/>
           </a:p>
           <a:p>
-            <a:pPr algn="l" indent="0" marL="0">
+            <a:pPr marL="0" indent="0" algn="l">
               <a:buNone/>
             </a:pPr>
             <a:r>
@@ -8579,7 +8594,7 @@
           <a:bodyPr wrap="square" rtlCol="0" anchor="ctr"/>
           <a:lstStyle/>
           <a:p>
-            <a:pPr algn="l" indent="0" marL="0">
+            <a:pPr marL="0" indent="0" algn="l">
               <a:buNone/>
             </a:pPr>
             <a:r>
@@ -8618,7 +8633,7 @@
           <a:bodyPr wrap="square" rtlCol="0" anchor="ctr"/>
           <a:lstStyle/>
           <a:p>
-            <a:pPr algn="l" indent="0" marL="0">
+            <a:pPr marL="0" indent="0" algn="l">
               <a:buNone/>
             </a:pPr>
             <a:r>
@@ -8635,7 +8650,7 @@
             <a:endParaRPr lang="en-US" sz="900" dirty="0"/>
           </a:p>
           <a:p>
-            <a:pPr algn="l" indent="0" marL="0">
+            <a:pPr marL="0" indent="0" algn="l">
               <a:buNone/>
             </a:pPr>
             <a:r>
@@ -8658,11 +8673,11 @@
   <p:clrMapOvr>
     <a:masterClrMapping/>
   </p:clrMapOvr>
-  <mc:AlternateContent xmlns:mc="http://schemas.openxmlformats.org/markup-compatibility/2006">
-    <mc:Choice xmlns:p14="http://schemas.microsoft.com/office/powerpoint/2010/main" Requires="p14">
+  <mc:AlternateContent xmlns:mc="http://schemas.openxmlformats.org/markup-compatibility/2006" xmlns:p14="http://schemas.microsoft.com/office/powerpoint/2010/main">
+    <mc:Choice Requires="p14">
       <p:transition spd="slow" p14:dur="2000"/>
     </mc:Choice>
-    <mc:Fallback>
+    <mc:Fallback xmlns="">
       <p:transition spd="slow"/>
     </mc:Fallback>
   </mc:AlternateContent>
@@ -8684,6 +8699,7 @@
         <a:solidFill>
           <a:srgbClr val="F2F2F2"/>
         </a:solidFill>
+        <a:effectLst/>
       </p:bgPr>
     </p:bg>
     <p:spTree>
@@ -8966,7 +8982,7 @@
           <a:bodyPr wrap="square" rtlCol="0" anchor="ctr"/>
           <a:lstStyle/>
           <a:p>
-            <a:pPr algn="ctr" indent="0" marL="0">
+            <a:pPr marL="0" indent="0" algn="ctr">
               <a:buNone/>
             </a:pPr>
             <a:r>
@@ -9005,7 +9021,7 @@
           <a:bodyPr wrap="square" rtlCol="0" anchor="ctr"/>
           <a:lstStyle/>
           <a:p>
-            <a:pPr algn="l" indent="0" marL="0">
+            <a:pPr marL="0" indent="0" algn="l">
               <a:buNone/>
             </a:pPr>
             <a:r>
@@ -9044,7 +9060,7 @@
           <a:bodyPr wrap="square" rtlCol="0" anchor="ctr"/>
           <a:lstStyle/>
           <a:p>
-            <a:pPr algn="l" indent="0" marL="0">
+            <a:pPr marL="0" indent="0" algn="l">
               <a:buNone/>
             </a:pPr>
             <a:r>
@@ -9108,7 +9124,7 @@
           <a:bodyPr wrap="square" rtlCol="0" anchor="ctr"/>
           <a:lstStyle/>
           <a:p>
-            <a:pPr algn="ctr" indent="0" marL="0">
+            <a:pPr marL="0" indent="0" algn="ctr">
               <a:buNone/>
             </a:pPr>
             <a:r>
@@ -9172,7 +9188,7 @@
           <a:bodyPr wrap="square" rtlCol="0" anchor="ctr"/>
           <a:lstStyle/>
           <a:p>
-            <a:pPr algn="ctr" indent="0" marL="0">
+            <a:pPr marL="0" indent="0" algn="ctr">
               <a:buNone/>
             </a:pPr>
             <a:r>
@@ -9236,7 +9252,7 @@
           <a:bodyPr wrap="square" rtlCol="0" anchor="ctr"/>
           <a:lstStyle/>
           <a:p>
-            <a:pPr algn="ctr" indent="0" marL="0">
+            <a:pPr marL="0" indent="0" algn="ctr">
               <a:buNone/>
             </a:pPr>
             <a:r>
@@ -9300,7 +9316,7 @@
           <a:bodyPr wrap="square" rtlCol="0" anchor="ctr"/>
           <a:lstStyle/>
           <a:p>
-            <a:pPr algn="ctr" indent="0" marL="0">
+            <a:pPr marL="0" indent="0" algn="ctr">
               <a:buNone/>
             </a:pPr>
             <a:r>
@@ -9364,7 +9380,7 @@
           <a:bodyPr wrap="square" rtlCol="0" anchor="ctr"/>
           <a:lstStyle/>
           <a:p>
-            <a:pPr algn="ctr" indent="0" marL="0">
+            <a:pPr marL="0" indent="0" algn="ctr">
               <a:buNone/>
             </a:pPr>
             <a:r>
@@ -9428,7 +9444,7 @@
           <a:bodyPr wrap="square" rtlCol="0" anchor="ctr"/>
           <a:lstStyle/>
           <a:p>
-            <a:pPr algn="ctr" indent="0" marL="0">
+            <a:pPr marL="0" indent="0" algn="ctr">
               <a:buNone/>
             </a:pPr>
             <a:r>
@@ -9617,7 +9633,7 @@
           <a:bodyPr wrap="square" rtlCol="0" anchor="ctr"/>
           <a:lstStyle/>
           <a:p>
-            <a:pPr algn="ctr" indent="0" marL="0">
+            <a:pPr marL="0" indent="0" algn="ctr">
               <a:buNone/>
             </a:pPr>
             <a:r>
@@ -9656,7 +9672,7 @@
           <a:bodyPr wrap="square" rtlCol="0" anchor="ctr"/>
           <a:lstStyle/>
           <a:p>
-            <a:pPr algn="l" indent="0" marL="0">
+            <a:pPr marL="0" indent="0" algn="l">
               <a:buNone/>
             </a:pPr>
             <a:r>
@@ -9695,7 +9711,7 @@
           <a:bodyPr wrap="square" rtlCol="0" anchor="ctr"/>
           <a:lstStyle/>
           <a:p>
-            <a:pPr algn="ctr" indent="0" marL="0">
+            <a:pPr marL="0" indent="0" algn="ctr">
               <a:buNone/>
             </a:pPr>
             <a:r>
@@ -9734,7 +9750,7 @@
           <a:bodyPr wrap="square" rtlCol="0" anchor="ctr"/>
           <a:lstStyle/>
           <a:p>
-            <a:pPr algn="ctr" indent="0" marL="0">
+            <a:pPr marL="0" indent="0" algn="ctr">
               <a:buNone/>
             </a:pPr>
             <a:r>
@@ -9773,7 +9789,7 @@
           <a:bodyPr wrap="square" rtlCol="0" anchor="ctr"/>
           <a:lstStyle/>
           <a:p>
-            <a:pPr algn="ctr" indent="0" marL="0">
+            <a:pPr marL="0" indent="0" algn="ctr">
               <a:buNone/>
             </a:pPr>
             <a:r>
@@ -9812,7 +9828,7 @@
           <a:bodyPr wrap="square" rtlCol="0" anchor="ctr"/>
           <a:lstStyle/>
           <a:p>
-            <a:pPr algn="ctr" indent="0" marL="0">
+            <a:pPr marL="0" indent="0" algn="ctr">
               <a:buNone/>
             </a:pPr>
             <a:r>
@@ -10001,7 +10017,7 @@
           <a:bodyPr wrap="square" rtlCol="0" anchor="ctr"/>
           <a:lstStyle/>
           <a:p>
-            <a:pPr algn="ctr" indent="0" marL="0">
+            <a:pPr marL="0" indent="0" algn="ctr">
               <a:buNone/>
             </a:pPr>
             <a:r>
@@ -10040,7 +10056,7 @@
           <a:bodyPr wrap="square" rtlCol="0" anchor="ctr"/>
           <a:lstStyle/>
           <a:p>
-            <a:pPr algn="l" indent="0" marL="0">
+            <a:pPr marL="0" indent="0" algn="l">
               <a:buNone/>
             </a:pPr>
             <a:r>
@@ -10079,7 +10095,7 @@
           <a:bodyPr wrap="square" rtlCol="0" anchor="ctr"/>
           <a:lstStyle/>
           <a:p>
-            <a:pPr algn="ctr" indent="0" marL="0">
+            <a:pPr marL="0" indent="0" algn="ctr">
               <a:buNone/>
             </a:pPr>
             <a:r>
@@ -10118,7 +10134,7 @@
           <a:bodyPr wrap="square" rtlCol="0" anchor="ctr"/>
           <a:lstStyle/>
           <a:p>
-            <a:pPr algn="ctr" indent="0" marL="0">
+            <a:pPr marL="0" indent="0" algn="ctr">
               <a:buNone/>
             </a:pPr>
             <a:r>
@@ -10157,7 +10173,7 @@
           <a:bodyPr wrap="square" rtlCol="0" anchor="ctr"/>
           <a:lstStyle/>
           <a:p>
-            <a:pPr algn="ctr" indent="0" marL="0">
+            <a:pPr marL="0" indent="0" algn="ctr">
               <a:buNone/>
             </a:pPr>
             <a:r>
@@ -10196,7 +10212,7 @@
           <a:bodyPr wrap="square" rtlCol="0" anchor="ctr"/>
           <a:lstStyle/>
           <a:p>
-            <a:pPr algn="ctr" indent="0" marL="0">
+            <a:pPr marL="0" indent="0" algn="ctr">
               <a:buNone/>
             </a:pPr>
             <a:r>
@@ -10385,7 +10401,7 @@
           <a:bodyPr wrap="square" rtlCol="0" anchor="ctr"/>
           <a:lstStyle/>
           <a:p>
-            <a:pPr algn="ctr" indent="0" marL="0">
+            <a:pPr marL="0" indent="0" algn="ctr">
               <a:buNone/>
             </a:pPr>
             <a:r>
@@ -10424,7 +10440,7 @@
           <a:bodyPr wrap="square" rtlCol="0" anchor="ctr"/>
           <a:lstStyle/>
           <a:p>
-            <a:pPr algn="l" indent="0" marL="0">
+            <a:pPr marL="0" indent="0" algn="l">
               <a:buNone/>
             </a:pPr>
             <a:r>
@@ -10463,7 +10479,7 @@
           <a:bodyPr wrap="square" rtlCol="0" anchor="ctr"/>
           <a:lstStyle/>
           <a:p>
-            <a:pPr algn="ctr" indent="0" marL="0">
+            <a:pPr marL="0" indent="0" algn="ctr">
               <a:buNone/>
             </a:pPr>
             <a:r>
@@ -10502,7 +10518,7 @@
           <a:bodyPr wrap="square" rtlCol="0" anchor="ctr"/>
           <a:lstStyle/>
           <a:p>
-            <a:pPr algn="ctr" indent="0" marL="0">
+            <a:pPr marL="0" indent="0" algn="ctr">
               <a:buNone/>
             </a:pPr>
             <a:r>
@@ -10541,7 +10557,7 @@
           <a:bodyPr wrap="square" rtlCol="0" anchor="ctr"/>
           <a:lstStyle/>
           <a:p>
-            <a:pPr algn="ctr" indent="0" marL="0">
+            <a:pPr marL="0" indent="0" algn="ctr">
               <a:buNone/>
             </a:pPr>
             <a:r>
@@ -10580,7 +10596,7 @@
           <a:bodyPr wrap="square" rtlCol="0" anchor="ctr"/>
           <a:lstStyle/>
           <a:p>
-            <a:pPr algn="ctr" indent="0" marL="0">
+            <a:pPr marL="0" indent="0" algn="ctr">
               <a:buNone/>
             </a:pPr>
             <a:r>
@@ -10769,7 +10785,7 @@
           <a:bodyPr wrap="square" rtlCol="0" anchor="ctr"/>
           <a:lstStyle/>
           <a:p>
-            <a:pPr algn="ctr" indent="0" marL="0">
+            <a:pPr marL="0" indent="0" algn="ctr">
               <a:buNone/>
             </a:pPr>
             <a:r>
@@ -10808,7 +10824,7 @@
           <a:bodyPr wrap="square" rtlCol="0" anchor="ctr"/>
           <a:lstStyle/>
           <a:p>
-            <a:pPr algn="l" indent="0" marL="0">
+            <a:pPr marL="0" indent="0" algn="l">
               <a:buNone/>
             </a:pPr>
             <a:r>
@@ -10847,7 +10863,7 @@
           <a:bodyPr wrap="square" rtlCol="0" anchor="ctr"/>
           <a:lstStyle/>
           <a:p>
-            <a:pPr algn="ctr" indent="0" marL="0">
+            <a:pPr marL="0" indent="0" algn="ctr">
               <a:buNone/>
             </a:pPr>
             <a:r>
@@ -10886,7 +10902,7 @@
           <a:bodyPr wrap="square" rtlCol="0" anchor="ctr"/>
           <a:lstStyle/>
           <a:p>
-            <a:pPr algn="ctr" indent="0" marL="0">
+            <a:pPr marL="0" indent="0" algn="ctr">
               <a:buNone/>
             </a:pPr>
             <a:r>
@@ -10925,7 +10941,7 @@
           <a:bodyPr wrap="square" rtlCol="0" anchor="ctr"/>
           <a:lstStyle/>
           <a:p>
-            <a:pPr algn="ctr" indent="0" marL="0">
+            <a:pPr marL="0" indent="0" algn="ctr">
               <a:buNone/>
             </a:pPr>
             <a:r>
@@ -10964,7 +10980,7 @@
           <a:bodyPr wrap="square" rtlCol="0" anchor="ctr"/>
           <a:lstStyle/>
           <a:p>
-            <a:pPr algn="ctr" indent="0" marL="0">
+            <a:pPr marL="0" indent="0" algn="ctr">
               <a:buNone/>
             </a:pPr>
             <a:r>
@@ -11153,7 +11169,7 @@
           <a:bodyPr wrap="square" rtlCol="0" anchor="ctr"/>
           <a:lstStyle/>
           <a:p>
-            <a:pPr algn="ctr" indent="0" marL="0">
+            <a:pPr marL="0" indent="0" algn="ctr">
               <a:buNone/>
             </a:pPr>
             <a:r>
@@ -11192,7 +11208,7 @@
           <a:bodyPr wrap="square" rtlCol="0" anchor="ctr"/>
           <a:lstStyle/>
           <a:p>
-            <a:pPr algn="l" indent="0" marL="0">
+            <a:pPr marL="0" indent="0" algn="l">
               <a:buNone/>
             </a:pPr>
             <a:r>
@@ -11231,7 +11247,7 @@
           <a:bodyPr wrap="square" rtlCol="0" anchor="ctr"/>
           <a:lstStyle/>
           <a:p>
-            <a:pPr algn="ctr" indent="0" marL="0">
+            <a:pPr marL="0" indent="0" algn="ctr">
               <a:buNone/>
             </a:pPr>
             <a:r>
@@ -11270,7 +11286,7 @@
           <a:bodyPr wrap="square" rtlCol="0" anchor="ctr"/>
           <a:lstStyle/>
           <a:p>
-            <a:pPr algn="ctr" indent="0" marL="0">
+            <a:pPr marL="0" indent="0" algn="ctr">
               <a:buNone/>
             </a:pPr>
             <a:r>
@@ -11309,7 +11325,7 @@
           <a:bodyPr wrap="square" rtlCol="0" anchor="ctr"/>
           <a:lstStyle/>
           <a:p>
-            <a:pPr algn="ctr" indent="0" marL="0">
+            <a:pPr marL="0" indent="0" algn="ctr">
               <a:buNone/>
             </a:pPr>
             <a:r>
@@ -11348,7 +11364,7 @@
           <a:bodyPr wrap="square" rtlCol="0" anchor="ctr"/>
           <a:lstStyle/>
           <a:p>
-            <a:pPr algn="ctr" indent="0" marL="0">
+            <a:pPr marL="0" indent="0" algn="ctr">
               <a:buNone/>
             </a:pPr>
             <a:r>
@@ -11537,7 +11553,7 @@
           <a:bodyPr wrap="square" rtlCol="0" anchor="ctr"/>
           <a:lstStyle/>
           <a:p>
-            <a:pPr algn="ctr" indent="0" marL="0">
+            <a:pPr marL="0" indent="0" algn="ctr">
               <a:buNone/>
             </a:pPr>
             <a:r>
@@ -11576,7 +11592,7 @@
           <a:bodyPr wrap="square" rtlCol="0" anchor="ctr"/>
           <a:lstStyle/>
           <a:p>
-            <a:pPr algn="l" indent="0" marL="0">
+            <a:pPr marL="0" indent="0" algn="l">
               <a:buNone/>
             </a:pPr>
             <a:r>
@@ -11615,7 +11631,7 @@
           <a:bodyPr wrap="square" rtlCol="0" anchor="ctr"/>
           <a:lstStyle/>
           <a:p>
-            <a:pPr algn="ctr" indent="0" marL="0">
+            <a:pPr marL="0" indent="0" algn="ctr">
               <a:buNone/>
             </a:pPr>
             <a:r>
@@ -11654,7 +11670,7 @@
           <a:bodyPr wrap="square" rtlCol="0" anchor="ctr"/>
           <a:lstStyle/>
           <a:p>
-            <a:pPr algn="ctr" indent="0" marL="0">
+            <a:pPr marL="0" indent="0" algn="ctr">
               <a:buNone/>
             </a:pPr>
             <a:r>
@@ -11693,7 +11709,7 @@
           <a:bodyPr wrap="square" rtlCol="0" anchor="ctr"/>
           <a:lstStyle/>
           <a:p>
-            <a:pPr algn="ctr" indent="0" marL="0">
+            <a:pPr marL="0" indent="0" algn="ctr">
               <a:buNone/>
             </a:pPr>
             <a:r>
@@ -11732,7 +11748,7 @@
           <a:bodyPr wrap="square" rtlCol="0" anchor="ctr"/>
           <a:lstStyle/>
           <a:p>
-            <a:pPr algn="ctr" indent="0" marL="0">
+            <a:pPr marL="0" indent="0" algn="ctr">
               <a:buNone/>
             </a:pPr>
             <a:r>
@@ -11921,7 +11937,7 @@
           <a:bodyPr wrap="square" rtlCol="0" anchor="ctr"/>
           <a:lstStyle/>
           <a:p>
-            <a:pPr algn="ctr" indent="0" marL="0">
+            <a:pPr marL="0" indent="0" algn="ctr">
               <a:buNone/>
             </a:pPr>
             <a:r>
@@ -11960,7 +11976,7 @@
           <a:bodyPr wrap="square" rtlCol="0" anchor="ctr"/>
           <a:lstStyle/>
           <a:p>
-            <a:pPr algn="l" indent="0" marL="0">
+            <a:pPr marL="0" indent="0" algn="l">
               <a:buNone/>
             </a:pPr>
             <a:r>
@@ -11999,7 +12015,7 @@
           <a:bodyPr wrap="square" rtlCol="0" anchor="ctr"/>
           <a:lstStyle/>
           <a:p>
-            <a:pPr algn="ctr" indent="0" marL="0">
+            <a:pPr marL="0" indent="0" algn="ctr">
               <a:buNone/>
             </a:pPr>
             <a:r>
@@ -12038,7 +12054,7 @@
           <a:bodyPr wrap="square" rtlCol="0" anchor="ctr"/>
           <a:lstStyle/>
           <a:p>
-            <a:pPr algn="ctr" indent="0" marL="0">
+            <a:pPr marL="0" indent="0" algn="ctr">
               <a:buNone/>
             </a:pPr>
             <a:r>
@@ -12077,7 +12093,7 @@
           <a:bodyPr wrap="square" rtlCol="0" anchor="ctr"/>
           <a:lstStyle/>
           <a:p>
-            <a:pPr algn="ctr" indent="0" marL="0">
+            <a:pPr marL="0" indent="0" algn="ctr">
               <a:buNone/>
             </a:pPr>
             <a:r>
@@ -12116,7 +12132,7 @@
           <a:bodyPr wrap="square" rtlCol="0" anchor="ctr"/>
           <a:lstStyle/>
           <a:p>
-            <a:pPr algn="ctr" indent="0" marL="0">
+            <a:pPr marL="0" indent="0" algn="ctr">
               <a:buNone/>
             </a:pPr>
             <a:r>
@@ -12305,7 +12321,7 @@
           <a:bodyPr wrap="square" rtlCol="0" anchor="ctr"/>
           <a:lstStyle/>
           <a:p>
-            <a:pPr algn="ctr" indent="0" marL="0">
+            <a:pPr marL="0" indent="0" algn="ctr">
               <a:buNone/>
             </a:pPr>
             <a:r>
@@ -12344,7 +12360,7 @@
           <a:bodyPr wrap="square" rtlCol="0" anchor="ctr"/>
           <a:lstStyle/>
           <a:p>
-            <a:pPr algn="l" indent="0" marL="0">
+            <a:pPr marL="0" indent="0" algn="l">
               <a:buNone/>
             </a:pPr>
             <a:r>
@@ -12383,7 +12399,7 @@
           <a:bodyPr wrap="square" rtlCol="0" anchor="ctr"/>
           <a:lstStyle/>
           <a:p>
-            <a:pPr algn="ctr" indent="0" marL="0">
+            <a:pPr marL="0" indent="0" algn="ctr">
               <a:buNone/>
             </a:pPr>
             <a:r>
@@ -12422,7 +12438,7 @@
           <a:bodyPr wrap="square" rtlCol="0" anchor="ctr"/>
           <a:lstStyle/>
           <a:p>
-            <a:pPr algn="ctr" indent="0" marL="0">
+            <a:pPr marL="0" indent="0" algn="ctr">
               <a:buNone/>
             </a:pPr>
             <a:r>
@@ -12461,7 +12477,7 @@
           <a:bodyPr wrap="square" rtlCol="0" anchor="ctr"/>
           <a:lstStyle/>
           <a:p>
-            <a:pPr algn="ctr" indent="0" marL="0">
+            <a:pPr marL="0" indent="0" algn="ctr">
               <a:buNone/>
             </a:pPr>
             <a:r>
@@ -12500,7 +12516,7 @@
           <a:bodyPr wrap="square" rtlCol="0" anchor="ctr"/>
           <a:lstStyle/>
           <a:p>
-            <a:pPr algn="ctr" indent="0" marL="0">
+            <a:pPr marL="0" indent="0" algn="ctr">
               <a:buNone/>
             </a:pPr>
             <a:r>
@@ -12689,7 +12705,7 @@
           <a:bodyPr wrap="square" rtlCol="0" anchor="ctr"/>
           <a:lstStyle/>
           <a:p>
-            <a:pPr algn="ctr" indent="0" marL="0">
+            <a:pPr marL="0" indent="0" algn="ctr">
               <a:buNone/>
             </a:pPr>
             <a:r>
@@ -12728,7 +12744,7 @@
           <a:bodyPr wrap="square" rtlCol="0" anchor="ctr"/>
           <a:lstStyle/>
           <a:p>
-            <a:pPr algn="l" indent="0" marL="0">
+            <a:pPr marL="0" indent="0" algn="l">
               <a:buNone/>
             </a:pPr>
             <a:r>
@@ -12767,7 +12783,7 @@
           <a:bodyPr wrap="square" rtlCol="0" anchor="ctr"/>
           <a:lstStyle/>
           <a:p>
-            <a:pPr algn="ctr" indent="0" marL="0">
+            <a:pPr marL="0" indent="0" algn="ctr">
               <a:buNone/>
             </a:pPr>
             <a:r>
@@ -12806,7 +12822,7 @@
           <a:bodyPr wrap="square" rtlCol="0" anchor="ctr"/>
           <a:lstStyle/>
           <a:p>
-            <a:pPr algn="ctr" indent="0" marL="0">
+            <a:pPr marL="0" indent="0" algn="ctr">
               <a:buNone/>
             </a:pPr>
             <a:r>
@@ -12845,7 +12861,7 @@
           <a:bodyPr wrap="square" rtlCol="0" anchor="ctr"/>
           <a:lstStyle/>
           <a:p>
-            <a:pPr algn="ctr" indent="0" marL="0">
+            <a:pPr marL="0" indent="0" algn="ctr">
               <a:buNone/>
             </a:pPr>
             <a:r>
@@ -12884,7 +12900,7 @@
           <a:bodyPr wrap="square" rtlCol="0" anchor="ctr"/>
           <a:lstStyle/>
           <a:p>
-            <a:pPr algn="ctr" indent="0" marL="0">
+            <a:pPr marL="0" indent="0" algn="ctr">
               <a:buNone/>
             </a:pPr>
             <a:r>
@@ -13073,7 +13089,7 @@
           <a:bodyPr wrap="square" rtlCol="0" anchor="ctr"/>
           <a:lstStyle/>
           <a:p>
-            <a:pPr algn="ctr" indent="0" marL="0">
+            <a:pPr marL="0" indent="0" algn="ctr">
               <a:buNone/>
             </a:pPr>
             <a:r>
@@ -13112,7 +13128,7 @@
           <a:bodyPr wrap="square" rtlCol="0" anchor="ctr"/>
           <a:lstStyle/>
           <a:p>
-            <a:pPr algn="l" indent="0" marL="0">
+            <a:pPr marL="0" indent="0" algn="l">
               <a:buNone/>
             </a:pPr>
             <a:r>
@@ -13151,7 +13167,7 @@
           <a:bodyPr wrap="square" rtlCol="0" anchor="ctr"/>
           <a:lstStyle/>
           <a:p>
-            <a:pPr algn="ctr" indent="0" marL="0">
+            <a:pPr marL="0" indent="0" algn="ctr">
               <a:buNone/>
             </a:pPr>
             <a:r>
@@ -13190,7 +13206,7 @@
           <a:bodyPr wrap="square" rtlCol="0" anchor="ctr"/>
           <a:lstStyle/>
           <a:p>
-            <a:pPr algn="ctr" indent="0" marL="0">
+            <a:pPr marL="0" indent="0" algn="ctr">
               <a:buNone/>
             </a:pPr>
             <a:r>
@@ -13229,7 +13245,7 @@
           <a:bodyPr wrap="square" rtlCol="0" anchor="ctr"/>
           <a:lstStyle/>
           <a:p>
-            <a:pPr algn="ctr" indent="0" marL="0">
+            <a:pPr marL="0" indent="0" algn="ctr">
               <a:buNone/>
             </a:pPr>
             <a:r>
@@ -13268,7 +13284,7 @@
           <a:bodyPr wrap="square" rtlCol="0" anchor="ctr"/>
           <a:lstStyle/>
           <a:p>
-            <a:pPr algn="ctr" indent="0" marL="0">
+            <a:pPr marL="0" indent="0" algn="ctr">
               <a:buNone/>
             </a:pPr>
             <a:r>
@@ -13457,7 +13473,7 @@
           <a:bodyPr wrap="square" rtlCol="0" anchor="ctr"/>
           <a:lstStyle/>
           <a:p>
-            <a:pPr algn="ctr" indent="0" marL="0">
+            <a:pPr marL="0" indent="0" algn="ctr">
               <a:buNone/>
             </a:pPr>
             <a:r>
@@ -13496,7 +13512,7 @@
           <a:bodyPr wrap="square" rtlCol="0" anchor="ctr"/>
           <a:lstStyle/>
           <a:p>
-            <a:pPr algn="l" indent="0" marL="0">
+            <a:pPr marL="0" indent="0" algn="l">
               <a:buNone/>
             </a:pPr>
             <a:r>
@@ -13535,7 +13551,7 @@
           <a:bodyPr wrap="square" rtlCol="0" anchor="ctr"/>
           <a:lstStyle/>
           <a:p>
-            <a:pPr algn="ctr" indent="0" marL="0">
+            <a:pPr marL="0" indent="0" algn="ctr">
               <a:buNone/>
             </a:pPr>
             <a:r>
@@ -13574,7 +13590,7 @@
           <a:bodyPr wrap="square" rtlCol="0" anchor="ctr"/>
           <a:lstStyle/>
           <a:p>
-            <a:pPr algn="ctr" indent="0" marL="0">
+            <a:pPr marL="0" indent="0" algn="ctr">
               <a:buNone/>
             </a:pPr>
             <a:r>
@@ -13613,7 +13629,7 @@
           <a:bodyPr wrap="square" rtlCol="0" anchor="ctr"/>
           <a:lstStyle/>
           <a:p>
-            <a:pPr algn="ctr" indent="0" marL="0">
+            <a:pPr marL="0" indent="0" algn="ctr">
               <a:buNone/>
             </a:pPr>
             <a:r>
@@ -13652,7 +13668,7 @@
           <a:bodyPr wrap="square" rtlCol="0" anchor="ctr"/>
           <a:lstStyle/>
           <a:p>
-            <a:pPr algn="ctr" indent="0" marL="0">
+            <a:pPr marL="0" indent="0" algn="ctr">
               <a:buNone/>
             </a:pPr>
             <a:r>
@@ -13841,7 +13857,7 @@
           <a:bodyPr wrap="square" rtlCol="0" anchor="ctr"/>
           <a:lstStyle/>
           <a:p>
-            <a:pPr algn="ctr" indent="0" marL="0">
+            <a:pPr marL="0" indent="0" algn="ctr">
               <a:buNone/>
             </a:pPr>
             <a:r>
@@ -13880,7 +13896,7 @@
           <a:bodyPr wrap="square" rtlCol="0" anchor="ctr"/>
           <a:lstStyle/>
           <a:p>
-            <a:pPr algn="l" indent="0" marL="0">
+            <a:pPr marL="0" indent="0" algn="l">
               <a:buNone/>
             </a:pPr>
             <a:r>
@@ -13919,7 +13935,7 @@
           <a:bodyPr wrap="square" rtlCol="0" anchor="ctr"/>
           <a:lstStyle/>
           <a:p>
-            <a:pPr algn="ctr" indent="0" marL="0">
+            <a:pPr marL="0" indent="0" algn="ctr">
               <a:buNone/>
             </a:pPr>
             <a:r>
@@ -13958,7 +13974,7 @@
           <a:bodyPr wrap="square" rtlCol="0" anchor="ctr"/>
           <a:lstStyle/>
           <a:p>
-            <a:pPr algn="ctr" indent="0" marL="0">
+            <a:pPr marL="0" indent="0" algn="ctr">
               <a:buNone/>
             </a:pPr>
             <a:r>
@@ -13997,7 +14013,7 @@
           <a:bodyPr wrap="square" rtlCol="0" anchor="ctr"/>
           <a:lstStyle/>
           <a:p>
-            <a:pPr algn="ctr" indent="0" marL="0">
+            <a:pPr marL="0" indent="0" algn="ctr">
               <a:buNone/>
             </a:pPr>
             <a:r>
@@ -14036,7 +14052,7 @@
           <a:bodyPr wrap="square" rtlCol="0" anchor="ctr"/>
           <a:lstStyle/>
           <a:p>
-            <a:pPr algn="ctr" indent="0" marL="0">
+            <a:pPr marL="0" indent="0" algn="ctr">
               <a:buNone/>
             </a:pPr>
             <a:r>
@@ -14100,7 +14116,7 @@
           <a:bodyPr wrap="square" rtlCol="0" anchor="ctr"/>
           <a:lstStyle/>
           <a:p>
-            <a:pPr algn="ctr" indent="0" marL="0">
+            <a:pPr marL="0" indent="0" algn="ctr">
               <a:buNone/>
             </a:pPr>
             <a:r>
@@ -14139,7 +14155,7 @@
           <a:bodyPr wrap="square" rtlCol="0" anchor="ctr"/>
           <a:lstStyle/>
           <a:p>
-            <a:pPr algn="ctr" indent="0" marL="0">
+            <a:pPr marL="0" indent="0" algn="ctr">
               <a:buNone/>
             </a:pPr>
             <a:r>
@@ -14178,7 +14194,7 @@
           <a:bodyPr wrap="square" rtlCol="0" anchor="ctr"/>
           <a:lstStyle/>
           <a:p>
-            <a:pPr algn="ctr" indent="0" marL="0">
+            <a:pPr marL="0" indent="0" algn="ctr">
               <a:buNone/>
             </a:pPr>
             <a:r>
@@ -14217,7 +14233,7 @@
           <a:bodyPr wrap="square" rtlCol="0" anchor="ctr"/>
           <a:lstStyle/>
           <a:p>
-            <a:pPr algn="ctr" indent="0" marL="0">
+            <a:pPr marL="0" indent="0" algn="ctr">
               <a:buNone/>
             </a:pPr>
             <a:r>
@@ -14256,7 +14272,7 @@
           <a:bodyPr wrap="square" rtlCol="0" anchor="ctr"/>
           <a:lstStyle/>
           <a:p>
-            <a:pPr algn="ctr" indent="0" marL="0">
+            <a:pPr marL="0" indent="0" algn="ctr">
               <a:buNone/>
             </a:pPr>
             <a:r>
@@ -14290,6 +14306,7 @@
         <a:solidFill>
           <a:srgbClr val="111111"/>
         </a:solidFill>
+        <a:effectLst/>
       </p:bgPr>
     </p:bg>
     <p:spTree>
@@ -14572,7 +14589,7 @@
           <a:bodyPr wrap="square" rtlCol="0" anchor="ctr"/>
           <a:lstStyle/>
           <a:p>
-            <a:pPr algn="ctr" indent="0" marL="0">
+            <a:pPr marL="0" indent="0" algn="ctr">
               <a:buNone/>
             </a:pPr>
             <a:r>
@@ -14611,7 +14628,7 @@
           <a:bodyPr wrap="square" rtlCol="0" anchor="ctr"/>
           <a:lstStyle/>
           <a:p>
-            <a:pPr algn="l" indent="0" marL="0">
+            <a:pPr marL="0" indent="0" algn="l">
               <a:buNone/>
             </a:pPr>
             <a:r>
@@ -14650,7 +14667,7 @@
           <a:bodyPr wrap="square" rtlCol="0" anchor="ctr"/>
           <a:lstStyle/>
           <a:p>
-            <a:pPr algn="l" indent="0" marL="0">
+            <a:pPr marL="0" indent="0" algn="l">
               <a:buNone/>
             </a:pPr>
             <a:r>
@@ -14764,7 +14781,7 @@
           <a:bodyPr wrap="square" rtlCol="0" anchor="ctr"/>
           <a:lstStyle/>
           <a:p>
-            <a:pPr algn="ctr" indent="0" marL="0">
+            <a:pPr marL="0" indent="0" algn="ctr">
               <a:buNone/>
             </a:pPr>
             <a:r>
@@ -14803,7 +14820,7 @@
           <a:bodyPr wrap="square" rtlCol="0" anchor="ctr"/>
           <a:lstStyle/>
           <a:p>
-            <a:pPr algn="l" indent="0" marL="0">
+            <a:pPr marL="0" indent="0" algn="l">
               <a:buNone/>
             </a:pPr>
             <a:r>
@@ -14842,7 +14859,7 @@
           <a:bodyPr wrap="square" rtlCol="0" anchor="ctr"/>
           <a:lstStyle/>
           <a:p>
-            <a:pPr algn="l" indent="0" marL="0">
+            <a:pPr marL="0" indent="0" algn="l">
               <a:buNone/>
             </a:pPr>
             <a:r>
@@ -14881,7 +14898,7 @@
           <a:bodyPr wrap="square" rtlCol="0" anchor="ctr"/>
           <a:lstStyle/>
           <a:p>
-            <a:pPr algn="l" indent="0" marL="0">
+            <a:pPr marL="0" indent="0" algn="l">
               <a:buNone/>
             </a:pPr>
             <a:r>
@@ -14995,7 +15012,7 @@
           <a:bodyPr wrap="square" rtlCol="0" anchor="ctr"/>
           <a:lstStyle/>
           <a:p>
-            <a:pPr algn="ctr" indent="0" marL="0">
+            <a:pPr marL="0" indent="0" algn="ctr">
               <a:buNone/>
             </a:pPr>
             <a:r>
@@ -15034,7 +15051,7 @@
           <a:bodyPr wrap="square" rtlCol="0" anchor="ctr"/>
           <a:lstStyle/>
           <a:p>
-            <a:pPr algn="l" indent="0" marL="0">
+            <a:pPr marL="0" indent="0" algn="l">
               <a:buNone/>
             </a:pPr>
             <a:r>
@@ -15073,7 +15090,7 @@
           <a:bodyPr wrap="square" rtlCol="0" anchor="ctr"/>
           <a:lstStyle/>
           <a:p>
-            <a:pPr algn="l" indent="0" marL="0">
+            <a:pPr marL="0" indent="0" algn="l">
               <a:buNone/>
             </a:pPr>
             <a:r>
@@ -15112,7 +15129,7 @@
           <a:bodyPr wrap="square" rtlCol="0" anchor="ctr"/>
           <a:lstStyle/>
           <a:p>
-            <a:pPr algn="l" indent="0" marL="0">
+            <a:pPr marL="0" indent="0" algn="l">
               <a:buNone/>
             </a:pPr>
             <a:r>
@@ -15226,7 +15243,7 @@
           <a:bodyPr wrap="square" rtlCol="0" anchor="ctr"/>
           <a:lstStyle/>
           <a:p>
-            <a:pPr algn="ctr" indent="0" marL="0">
+            <a:pPr marL="0" indent="0" algn="ctr">
               <a:buNone/>
             </a:pPr>
             <a:r>
@@ -15265,7 +15282,7 @@
           <a:bodyPr wrap="square" rtlCol="0" anchor="ctr"/>
           <a:lstStyle/>
           <a:p>
-            <a:pPr algn="l" indent="0" marL="0">
+            <a:pPr marL="0" indent="0" algn="l">
               <a:buNone/>
             </a:pPr>
             <a:r>
@@ -15304,7 +15321,7 @@
           <a:bodyPr wrap="square" rtlCol="0" anchor="ctr"/>
           <a:lstStyle/>
           <a:p>
-            <a:pPr algn="l" indent="0" marL="0">
+            <a:pPr marL="0" indent="0" algn="l">
               <a:buNone/>
             </a:pPr>
             <a:r>
@@ -15343,7 +15360,7 @@
           <a:bodyPr wrap="square" rtlCol="0" anchor="ctr"/>
           <a:lstStyle/>
           <a:p>
-            <a:pPr algn="l" indent="0" marL="0">
+            <a:pPr marL="0" indent="0" algn="l">
               <a:buNone/>
             </a:pPr>
             <a:r>
@@ -15457,7 +15474,7 @@
           <a:bodyPr wrap="square" rtlCol="0" anchor="ctr"/>
           <a:lstStyle/>
           <a:p>
-            <a:pPr algn="ctr" indent="0" marL="0">
+            <a:pPr marL="0" indent="0" algn="ctr">
               <a:buNone/>
             </a:pPr>
             <a:r>
@@ -15496,7 +15513,7 @@
           <a:bodyPr wrap="square" rtlCol="0" anchor="ctr"/>
           <a:lstStyle/>
           <a:p>
-            <a:pPr algn="l" indent="0" marL="0">
+            <a:pPr marL="0" indent="0" algn="l">
               <a:buNone/>
             </a:pPr>
             <a:r>
@@ -15535,7 +15552,7 @@
           <a:bodyPr wrap="square" rtlCol="0" anchor="ctr"/>
           <a:lstStyle/>
           <a:p>
-            <a:pPr algn="l" indent="0" marL="0">
+            <a:pPr marL="0" indent="0" algn="l">
               <a:buNone/>
             </a:pPr>
             <a:r>
@@ -15574,7 +15591,7 @@
           <a:bodyPr wrap="square" rtlCol="0" anchor="ctr"/>
           <a:lstStyle/>
           <a:p>
-            <a:pPr algn="l" indent="0" marL="0">
+            <a:pPr marL="0" indent="0" algn="l">
               <a:buNone/>
             </a:pPr>
             <a:r>
@@ -15601,13 +15618,14 @@
 </file>
 
 <file path=ppt/slides/slide7.xml><?xml version="1.0" encoding="utf-8"?>
-<p:sld xmlns:a="http://schemas.openxmlformats.org/drawingml/2006/main" xmlns:r="http://schemas.openxmlformats.org/officeDocument/2006/relationships" xmlns:p="http://schemas.openxmlformats.org/presentationml/2006/main" xmlns:p14="http://schemas.microsoft.com/office/powerpoint/2010/main">
+<p:sld xmlns:a="http://schemas.openxmlformats.org/drawingml/2006/main" xmlns:r="http://schemas.openxmlformats.org/officeDocument/2006/relationships" xmlns:p="http://schemas.openxmlformats.org/presentationml/2006/main">
   <p:cSld name="Slide 7">
     <p:bg>
       <p:bgPr>
         <a:solidFill>
           <a:srgbClr val="F2F2F2"/>
         </a:solidFill>
+        <a:effectLst/>
       </p:bgPr>
     </p:bg>
     <p:spTree>
@@ -15890,7 +15908,7 @@
           <a:bodyPr wrap="square" rtlCol="0" anchor="ctr"/>
           <a:lstStyle/>
           <a:p>
-            <a:pPr algn="ctr" indent="0" marL="0">
+            <a:pPr marL="0" indent="0" algn="ctr">
               <a:buNone/>
             </a:pPr>
             <a:r>
@@ -15929,7 +15947,7 @@
           <a:bodyPr wrap="square" rtlCol="0" anchor="ctr"/>
           <a:lstStyle/>
           <a:p>
-            <a:pPr algn="l" indent="0" marL="0">
+            <a:pPr marL="0" indent="0" algn="l">
               <a:buNone/>
             </a:pPr>
             <a:r>
@@ -15956,7 +15974,7 @@
           <p:nvPr/>
         </p:nvPicPr>
         <p:blipFill rotWithShape="1">
-          <a:blip r:embed="rId1" cstate="print">
+          <a:blip r:embed="rId3" cstate="print">
             <a:extLst>
               <a:ext uri="{28A0092B-C50C-407E-A947-70E740481C1C}">
                 <a14:useLocalDpi xmlns:a14="http://schemas.microsoft.com/office/drawing/2010/main" val="0"/>
@@ -15969,11 +15987,13 @@
           </a:stretch>
         </p:blipFill>
         <p:spPr>
-          <a:xfrm rot="0">
+          <a:xfrm>
             <a:off x="274320" y="837565"/>
             <a:ext cx="6401435" cy="2226310"/>
           </a:xfrm>
-          <a:prstGeom prst="rect"/>
+          <a:prstGeom prst="rect">
+            <a:avLst/>
+          </a:prstGeom>
           <a:noFill/>
         </p:spPr>
       </p:pic>
@@ -15986,7 +16006,7 @@
           <p:nvPr/>
         </p:nvPicPr>
         <p:blipFill rotWithShape="1">
-          <a:blip r:embed="rId2" cstate="print">
+          <a:blip r:embed="rId4" cstate="print">
             <a:extLst>
               <a:ext uri="{28A0092B-C50C-407E-A947-70E740481C1C}">
                 <a14:useLocalDpi xmlns:a14="http://schemas.microsoft.com/office/drawing/2010/main" val="0"/>
@@ -15999,11 +16019,13 @@
           </a:stretch>
         </p:blipFill>
         <p:spPr>
-          <a:xfrm rot="0">
+          <a:xfrm>
             <a:off x="6812280" y="844550"/>
             <a:ext cx="2149475" cy="2219325"/>
           </a:xfrm>
-          <a:prstGeom prst="rect"/>
+          <a:prstGeom prst="rect">
+            <a:avLst/>
+          </a:prstGeom>
           <a:noFill/>
         </p:spPr>
       </p:pic>
@@ -16053,7 +16075,7 @@
           <a:bodyPr wrap="square" rtlCol="0" anchor="ctr"/>
           <a:lstStyle/>
           <a:p>
-            <a:pPr algn="ctr" indent="0" marL="0">
+            <a:pPr marL="0" indent="0" algn="ctr">
               <a:buNone/>
             </a:pPr>
             <a:r>
@@ -16117,7 +16139,7 @@
           <a:bodyPr wrap="square" rtlCol="0" anchor="ctr"/>
           <a:lstStyle/>
           <a:p>
-            <a:pPr algn="ctr" indent="0" marL="0">
+            <a:pPr marL="0" indent="0" algn="ctr">
               <a:buNone/>
             </a:pPr>
             <a:r>
@@ -16156,7 +16178,7 @@
           <a:bodyPr wrap="square" rtlCol="0" anchor="ctr"/>
           <a:lstStyle/>
           <a:p>
-            <a:pPr algn="ctr" indent="0" marL="0">
+            <a:pPr marL="0" indent="0" algn="ctr">
               <a:buNone/>
             </a:pPr>
             <a:r>
@@ -16267,7 +16289,7 @@
           <a:bodyPr wrap="square" rtlCol="0" anchor="ctr"/>
           <a:lstStyle/>
           <a:p>
-            <a:pPr algn="ctr" indent="0" marL="0">
+            <a:pPr marL="0" indent="0" algn="ctr">
               <a:buNone/>
             </a:pPr>
             <a:r>
@@ -16306,7 +16328,7 @@
           <a:bodyPr wrap="square" rtlCol="0" anchor="ctr"/>
           <a:lstStyle/>
           <a:p>
-            <a:pPr algn="ctr" indent="0" marL="0">
+            <a:pPr marL="0" indent="0" algn="ctr">
               <a:buNone/>
             </a:pPr>
             <a:r>
@@ -16417,7 +16439,7 @@
           <a:bodyPr wrap="square" rtlCol="0" anchor="ctr"/>
           <a:lstStyle/>
           <a:p>
-            <a:pPr algn="ctr" indent="0" marL="0">
+            <a:pPr marL="0" indent="0" algn="ctr">
               <a:buNone/>
             </a:pPr>
             <a:r>
@@ -16456,7 +16478,7 @@
           <a:bodyPr wrap="square" rtlCol="0" anchor="ctr"/>
           <a:lstStyle/>
           <a:p>
-            <a:pPr algn="ctr" indent="0" marL="0">
+            <a:pPr marL="0" indent="0" algn="ctr">
               <a:buNone/>
             </a:pPr>
             <a:r>
@@ -16567,7 +16589,7 @@
           <a:bodyPr wrap="square" rtlCol="0" anchor="ctr"/>
           <a:lstStyle/>
           <a:p>
-            <a:pPr algn="ctr" indent="0" marL="0">
+            <a:pPr marL="0" indent="0" algn="ctr">
               <a:buNone/>
             </a:pPr>
             <a:r>
@@ -16606,7 +16628,7 @@
           <a:bodyPr wrap="square" rtlCol="0" anchor="ctr"/>
           <a:lstStyle/>
           <a:p>
-            <a:pPr algn="ctr" indent="0" marL="0">
+            <a:pPr marL="0" indent="0" algn="ctr">
               <a:buNone/>
             </a:pPr>
             <a:r>
@@ -16680,18 +16702,20 @@
           <p:nvPr/>
         </p:nvSpPr>
         <p:spPr>
-          <a:xfrm rot="0">
+          <a:xfrm>
             <a:off x="2373630" y="636905"/>
             <a:ext cx="2193925" cy="208280"/>
           </a:xfrm>
-          <a:prstGeom prst="rect"/>
+          <a:prstGeom prst="rect">
+            <a:avLst/>
+          </a:prstGeom>
           <a:noFill/>
           <a:ln cap="flat" cmpd="sng">
             <a:prstDash/>
           </a:ln>
         </p:spPr>
         <p:txBody>
-          <a:bodyPr wrap="square" lIns="91440" tIns="45720" rIns="91440" bIns="45720" numCol="1" vert="horz" anchor="ctr">
+          <a:bodyPr vert="horz" wrap="square" lIns="91440" tIns="45720" rIns="91440" bIns="45720" numCol="1" anchor="ctr">
             <a:noAutofit/>
           </a:bodyPr>
           <a:lstStyle/>
@@ -16709,95 +16733,7 @@
                 <a:ea typeface="맑은 고딕" charset="0"/>
                 <a:cs typeface="Arial Black" charset="0"/>
               </a:rPr>
-              <a:t>▼ </a:t>
-            </a:r>
-            <a:r>
-              <a:rPr lang="ko-KR" sz="800" b="1">
-                <a:solidFill>
-                  <a:schemeClr val="tx1"/>
-                </a:solidFill>
-                <a:latin typeface="맑은 고딕" charset="0"/>
-                <a:ea typeface="맑은 고딕" charset="0"/>
-                <a:cs typeface="Arial Black" charset="0"/>
-              </a:rPr>
-              <a:t>12</a:t>
-            </a:r>
-            <a:r>
-              <a:rPr lang="ko-KR" sz="800" b="1">
-                <a:solidFill>
-                  <a:schemeClr val="tx1"/>
-                </a:solidFill>
-                <a:latin typeface="맑은 고딕" charset="0"/>
-                <a:ea typeface="맑은 고딕" charset="0"/>
-                <a:cs typeface="Arial Black" charset="0"/>
-              </a:rPr>
-              <a:t>개</a:t>
-            </a:r>
-            <a:r>
-              <a:rPr lang="ko-KR" sz="800" b="1">
-                <a:solidFill>
-                  <a:schemeClr val="tx1"/>
-                </a:solidFill>
-                <a:latin typeface="맑은 고딕" charset="0"/>
-                <a:ea typeface="맑은 고딕" charset="0"/>
-                <a:cs typeface="Arial Black" charset="0"/>
-              </a:rPr>
-              <a:t> </a:t>
-            </a:r>
-            <a:r>
-              <a:rPr lang="ko-KR" sz="800" b="1">
-                <a:solidFill>
-                  <a:schemeClr val="tx1"/>
-                </a:solidFill>
-                <a:latin typeface="맑은 고딕" charset="0"/>
-                <a:ea typeface="맑은 고딕" charset="0"/>
-                <a:cs typeface="Arial Black" charset="0"/>
-              </a:rPr>
-              <a:t>질문별 </a:t>
-            </a:r>
-            <a:r>
-              <a:rPr lang="ko-KR" sz="800" b="1">
-                <a:solidFill>
-                  <a:schemeClr val="tx1"/>
-                </a:solidFill>
-                <a:latin typeface="맑은 고딕" charset="0"/>
-                <a:ea typeface="맑은 고딕" charset="0"/>
-                <a:cs typeface="Arial Black" charset="0"/>
-              </a:rPr>
-              <a:t>R</a:t>
-            </a:r>
-            <a:r>
-              <a:rPr lang="ko-KR" sz="800" b="1">
-                <a:solidFill>
-                  <a:schemeClr val="tx1"/>
-                </a:solidFill>
-                <a:latin typeface="맑은 고딕" charset="0"/>
-                <a:ea typeface="맑은 고딕" charset="0"/>
-                <a:cs typeface="Arial Black" charset="0"/>
-              </a:rPr>
-              <a:t>agas </a:t>
-            </a:r>
-            <a:r>
-              <a:rPr lang="ko-KR" sz="800" b="1">
-                <a:solidFill>
-                  <a:schemeClr val="tx1"/>
-                </a:solidFill>
-                <a:latin typeface="맑은 고딕" charset="0"/>
-                <a:ea typeface="맑은 고딕" charset="0"/>
-                <a:cs typeface="Arial Black" charset="0"/>
-              </a:rPr>
-              <a:t>4가지 </a:t>
-            </a:r>
-            <a:r>
-              <a:rPr lang="ko-KR" sz="800" b="1">
-                <a:solidFill>
-                  <a:schemeClr val="tx1"/>
-                </a:solidFill>
-                <a:latin typeface="맑은 고딕" charset="0"/>
-                <a:ea typeface="맑은 고딕" charset="0"/>
-                <a:cs typeface="Arial Black" charset="0"/>
-              </a:rPr>
-              <a:t>지표</a:t>
+              <a:t>▼ 12개 질문별 Ragas 4가지 지표</a:t>
             </a:r>
             <a:endParaRPr lang="ko-KR" altLang="en-US" sz="800" b="1">
               <a:solidFill>
@@ -16819,18 +16755,20 @@
           <p:nvPr/>
         </p:nvSpPr>
         <p:spPr>
-          <a:xfrm rot="0">
+          <a:xfrm>
             <a:off x="6786245" y="639445"/>
             <a:ext cx="2193925" cy="208280"/>
           </a:xfrm>
-          <a:prstGeom prst="rect"/>
+          <a:prstGeom prst="rect">
+            <a:avLst/>
+          </a:prstGeom>
           <a:noFill/>
           <a:ln cap="flat" cmpd="sng">
             <a:prstDash/>
           </a:ln>
         </p:spPr>
         <p:txBody>
-          <a:bodyPr wrap="square" lIns="91440" tIns="45720" rIns="91440" bIns="45720" numCol="1" vert="horz" anchor="ctr">
+          <a:bodyPr vert="horz" wrap="square" lIns="91440" tIns="45720" rIns="91440" bIns="45720" numCol="1" anchor="ctr">
             <a:noAutofit/>
           </a:bodyPr>
           <a:lstStyle/>
@@ -16848,51 +16786,7 @@
                 <a:ea typeface="맑은 고딕" charset="0"/>
                 <a:cs typeface="Arial Black" charset="0"/>
               </a:rPr>
-              <a:t>▼ 질문별 </a:t>
-            </a:r>
-            <a:r>
-              <a:rPr lang="ko-KR" sz="800" b="1">
-                <a:solidFill>
-                  <a:schemeClr val="tx1"/>
-                </a:solidFill>
-                <a:latin typeface="맑은 고딕" charset="0"/>
-                <a:ea typeface="맑은 고딕" charset="0"/>
-                <a:cs typeface="Arial Black" charset="0"/>
-              </a:rPr>
-              <a:t>지표 </a:t>
-            </a:r>
-            <a:r>
-              <a:rPr lang="ko-KR" sz="800" b="1">
-                <a:solidFill>
-                  <a:schemeClr val="tx1"/>
-                </a:solidFill>
-                <a:latin typeface="맑은 고딕" charset="0"/>
-                <a:ea typeface="맑은 고딕" charset="0"/>
-                <a:cs typeface="Arial Black" charset="0"/>
-              </a:rPr>
-              <a:t>평균(</a:t>
-            </a:r>
-            <a:r>
-              <a:rPr lang="ko-KR" sz="800" b="1">
-                <a:solidFill>
-                  <a:schemeClr val="tx1"/>
-                </a:solidFill>
-                <a:latin typeface="맑은 고딕" charset="0"/>
-                <a:ea typeface="맑은 고딕" charset="0"/>
-                <a:cs typeface="Arial Black" charset="0"/>
-              </a:rPr>
-              <a:t>12개 질문</a:t>
-            </a:r>
-            <a:r>
-              <a:rPr lang="ko-KR" sz="800" b="1">
-                <a:solidFill>
-                  <a:schemeClr val="tx1"/>
-                </a:solidFill>
-                <a:latin typeface="맑은 고딕" charset="0"/>
-                <a:ea typeface="맑은 고딕" charset="0"/>
-                <a:cs typeface="Arial Black" charset="0"/>
-              </a:rPr>
-              <a:t>)</a:t>
+              <a:t>▼ 질문별 지표 평균(12개 질문)</a:t>
             </a:r>
             <a:endParaRPr lang="ko-KR" altLang="en-US" sz="800" b="1">
               <a:solidFill>
@@ -16910,11 +16804,11 @@
   <p:clrMapOvr>
     <a:masterClrMapping/>
   </p:clrMapOvr>
-  <mc:AlternateContent xmlns:mc="http://schemas.openxmlformats.org/markup-compatibility/2006">
-    <mc:Choice xmlns:p14="http://schemas.microsoft.com/office/powerpoint/2010/main" Requires="p14">
+  <mc:AlternateContent xmlns:mc="http://schemas.openxmlformats.org/markup-compatibility/2006" xmlns:p14="http://schemas.microsoft.com/office/powerpoint/2010/main">
+    <mc:Choice Requires="p14">
       <p:transition spd="slow" p14:dur="2000"/>
     </mc:Choice>
-    <mc:Fallback>
+    <mc:Fallback xmlns="">
       <p:transition spd="slow"/>
     </mc:Fallback>
   </mc:AlternateContent>
@@ -16929,13 +16823,14 @@
 </file>
 
 <file path=ppt/slides/slide8.xml><?xml version="1.0" encoding="utf-8"?>
-<p:sld xmlns:a="http://schemas.openxmlformats.org/drawingml/2006/main" xmlns:r="http://schemas.openxmlformats.org/officeDocument/2006/relationships" xmlns:p="http://schemas.openxmlformats.org/presentationml/2006/main" xmlns:p14="http://schemas.microsoft.com/office/powerpoint/2010/main">
+<p:sld xmlns:a="http://schemas.openxmlformats.org/drawingml/2006/main" xmlns:r="http://schemas.openxmlformats.org/officeDocument/2006/relationships" xmlns:p="http://schemas.openxmlformats.org/presentationml/2006/main">
   <p:cSld name="Slide 8">
     <p:bg>
       <p:bgPr>
         <a:solidFill>
           <a:srgbClr val="111111"/>
         </a:solidFill>
+        <a:effectLst/>
       </p:bgPr>
     </p:bg>
     <p:spTree>
@@ -17218,7 +17113,7 @@
           <a:bodyPr wrap="square" rtlCol="0" anchor="ctr"/>
           <a:lstStyle/>
           <a:p>
-            <a:pPr algn="ctr" indent="0" marL="0">
+            <a:pPr marL="0" indent="0" algn="ctr">
               <a:buNone/>
             </a:pPr>
             <a:r>
@@ -17257,7 +17152,7 @@
           <a:bodyPr wrap="square" rtlCol="0" anchor="ctr"/>
           <a:lstStyle/>
           <a:p>
-            <a:pPr algn="l" indent="0" marL="0">
+            <a:pPr marL="0" indent="0" algn="l">
               <a:buNone/>
             </a:pPr>
             <a:r>
@@ -17284,7 +17179,7 @@
           <p:nvPr/>
         </p:nvPicPr>
         <p:blipFill rotWithShape="1">
-          <a:blip r:embed="rId1" cstate="print">
+          <a:blip r:embed="rId3" cstate="print">
             <a:extLst>
               <a:ext uri="{28A0092B-C50C-407E-A947-70E740481C1C}">
                 <a14:useLocalDpi xmlns:a14="http://schemas.microsoft.com/office/drawing/2010/main" val="0"/>
@@ -17297,11 +17192,13 @@
           </a:stretch>
         </p:blipFill>
         <p:spPr>
-          <a:xfrm rot="0">
+          <a:xfrm>
             <a:off x="274320" y="892810"/>
             <a:ext cx="6218555" cy="2125345"/>
           </a:xfrm>
-          <a:prstGeom prst="rect"/>
+          <a:prstGeom prst="rect">
+            <a:avLst/>
+          </a:prstGeom>
           <a:noFill/>
         </p:spPr>
       </p:pic>
@@ -17314,7 +17211,7 @@
           <p:nvPr/>
         </p:nvPicPr>
         <p:blipFill rotWithShape="1">
-          <a:blip r:embed="rId2" cstate="print">
+          <a:blip r:embed="rId4" cstate="print">
             <a:extLst>
               <a:ext uri="{28A0092B-C50C-407E-A947-70E740481C1C}">
                 <a14:useLocalDpi xmlns:a14="http://schemas.microsoft.com/office/drawing/2010/main" val="0"/>
@@ -17327,11 +17224,13 @@
           </a:stretch>
         </p:blipFill>
         <p:spPr>
-          <a:xfrm rot="0">
+          <a:xfrm>
             <a:off x="6583680" y="775970"/>
             <a:ext cx="2423795" cy="2242185"/>
           </a:xfrm>
-          <a:prstGeom prst="rect"/>
+          <a:prstGeom prst="rect">
+            <a:avLst/>
+          </a:prstGeom>
           <a:noFill/>
         </p:spPr>
       </p:pic>
@@ -17381,7 +17280,7 @@
           <a:bodyPr wrap="square" rtlCol="0" anchor="ctr"/>
           <a:lstStyle/>
           <a:p>
-            <a:pPr algn="l" indent="0" marL="0">
+            <a:pPr marL="0" indent="0" algn="l">
               <a:buNone/>
             </a:pPr>
             <a:r>
@@ -17420,7 +17319,7 @@
           <a:bodyPr wrap="square" rtlCol="0" anchor="ctr"/>
           <a:lstStyle/>
           <a:p>
-            <a:pPr algn="l" indent="0" marL="0">
+            <a:pPr marL="0" indent="0" algn="l">
               <a:buNone/>
             </a:pPr>
             <a:r>
@@ -17484,7 +17383,7 @@
           <a:bodyPr wrap="square" rtlCol="0" anchor="ctr"/>
           <a:lstStyle/>
           <a:p>
-            <a:pPr algn="l" indent="0" marL="0">
+            <a:pPr marL="0" indent="0" algn="l">
               <a:buNone/>
             </a:pPr>
             <a:r>
@@ -17523,7 +17422,7 @@
           <a:bodyPr wrap="square" rtlCol="0" anchor="ctr"/>
           <a:lstStyle/>
           <a:p>
-            <a:pPr algn="l" indent="0" marL="0">
+            <a:pPr marL="0" indent="0" algn="l">
               <a:buNone/>
             </a:pPr>
             <a:r>
@@ -17587,7 +17486,7 @@
           <a:bodyPr wrap="square" rtlCol="0" anchor="ctr"/>
           <a:lstStyle/>
           <a:p>
-            <a:pPr algn="l" indent="0" marL="0">
+            <a:pPr marL="0" indent="0" algn="l">
               <a:buNone/>
             </a:pPr>
             <a:r>
@@ -17626,7 +17525,7 @@
           <a:bodyPr wrap="square" rtlCol="0" anchor="ctr"/>
           <a:lstStyle/>
           <a:p>
-            <a:pPr algn="l" indent="0" marL="0">
+            <a:pPr marL="0" indent="0" algn="l">
               <a:buNone/>
             </a:pPr>
             <a:r>
@@ -17690,7 +17589,7 @@
           <a:bodyPr wrap="square" rtlCol="0" anchor="ctr"/>
           <a:lstStyle/>
           <a:p>
-            <a:pPr algn="l" indent="0" marL="0">
+            <a:pPr marL="0" indent="0" algn="l">
               <a:buNone/>
             </a:pPr>
             <a:r>
@@ -17729,7 +17628,7 @@
           <a:bodyPr wrap="square" rtlCol="0" anchor="ctr"/>
           <a:lstStyle/>
           <a:p>
-            <a:pPr algn="l" indent="0" marL="0">
+            <a:pPr marL="0" indent="0" algn="l">
               <a:buNone/>
             </a:pPr>
             <a:r>
@@ -17756,18 +17655,20 @@
           <p:nvPr/>
         </p:nvSpPr>
         <p:spPr>
-          <a:xfrm rot="0">
+          <a:xfrm>
             <a:off x="2277745" y="678180"/>
             <a:ext cx="2193925" cy="208280"/>
           </a:xfrm>
-          <a:prstGeom prst="rect"/>
+          <a:prstGeom prst="rect">
+            <a:avLst/>
+          </a:prstGeom>
           <a:noFill/>
           <a:ln cap="flat" cmpd="sng">
             <a:prstDash/>
           </a:ln>
         </p:spPr>
         <p:txBody>
-          <a:bodyPr wrap="square" lIns="91440" tIns="45720" rIns="91440" bIns="45720" numCol="1" vert="horz" anchor="ctr">
+          <a:bodyPr vert="horz" wrap="square" lIns="91440" tIns="45720" rIns="91440" bIns="45720" numCol="1" anchor="ctr">
             <a:noAutofit/>
           </a:bodyPr>
           <a:lstStyle/>
@@ -17785,84 +17686,7 @@
                 <a:ea typeface="맑은 고딕" charset="0"/>
                 <a:cs typeface="Arial Black" charset="0"/>
               </a:rPr>
-              <a:t>▼ </a:t>
-            </a:r>
-            <a:r>
-              <a:rPr lang="ko-KR" sz="800" b="1">
-                <a:solidFill>
-                  <a:schemeClr val="bg1"/>
-                </a:solidFill>
-                <a:latin typeface="맑은 고딕" charset="0"/>
-                <a:ea typeface="맑은 고딕" charset="0"/>
-                <a:cs typeface="Arial Black" charset="0"/>
-              </a:rPr>
-              <a:t>질문별 </a:t>
-            </a:r>
-            <a:r>
-              <a:rPr lang="ko-KR" sz="800" b="1">
-                <a:solidFill>
-                  <a:schemeClr val="bg1"/>
-                </a:solidFill>
-                <a:latin typeface="맑은 고딕" charset="0"/>
-                <a:ea typeface="맑은 고딕" charset="0"/>
-                <a:cs typeface="Arial Black" charset="0"/>
-              </a:rPr>
-              <a:t>지표 </a:t>
-            </a:r>
-            <a:r>
-              <a:rPr lang="ko-KR" sz="800" b="1">
-                <a:solidFill>
-                  <a:schemeClr val="bg1"/>
-                </a:solidFill>
-                <a:latin typeface="맑은 고딕" charset="0"/>
-                <a:ea typeface="맑은 고딕" charset="0"/>
-                <a:cs typeface="Arial Black" charset="0"/>
-              </a:rPr>
-              <a:t>추이</a:t>
-            </a:r>
-            <a:r>
-              <a:rPr lang="ko-KR" sz="800" b="1">
-                <a:solidFill>
-                  <a:schemeClr val="bg1"/>
-                </a:solidFill>
-                <a:latin typeface="맑은 고딕" charset="0"/>
-                <a:ea typeface="맑은 고딕" charset="0"/>
-                <a:cs typeface="Arial Black" charset="0"/>
-              </a:rPr>
-              <a:t> </a:t>
-            </a:r>
-            <a:r>
-              <a:rPr lang="ko-KR" sz="800" b="1">
-                <a:solidFill>
-                  <a:schemeClr val="bg1"/>
-                </a:solidFill>
-                <a:latin typeface="맑은 고딕" charset="0"/>
-                <a:ea typeface="맑은 고딕" charset="0"/>
-                <a:cs typeface="Arial Black" charset="0"/>
-              </a:rPr>
-              <a:t>(Q1~Q</a:t>
-            </a:r>
-            <a:r>
-              <a:rPr lang="ko-KR" sz="800" b="1">
-                <a:solidFill>
-                  <a:schemeClr val="bg1"/>
-                </a:solidFill>
-                <a:latin typeface="맑은 고딕" charset="0"/>
-                <a:ea typeface="맑은 고딕" charset="0"/>
-                <a:cs typeface="Arial Black" charset="0"/>
-              </a:rPr>
-              <a:t>1</a:t>
-            </a:r>
-            <a:r>
-              <a:rPr lang="ko-KR" sz="800" b="1">
-                <a:solidFill>
-                  <a:schemeClr val="bg1"/>
-                </a:solidFill>
-                <a:latin typeface="맑은 고딕" charset="0"/>
-                <a:ea typeface="맑은 고딕" charset="0"/>
-                <a:cs typeface="Arial Black" charset="0"/>
-              </a:rPr>
-              <a:t>2)</a:t>
+              <a:t>▼ 질문별 지표 추이 (Q1~Q12)</a:t>
             </a:r>
             <a:endParaRPr lang="ko-KR" altLang="en-US" sz="800" b="1">
               <a:solidFill>
@@ -17884,18 +17708,20 @@
           <p:nvPr/>
         </p:nvSpPr>
         <p:spPr>
-          <a:xfrm rot="0">
+          <a:xfrm>
             <a:off x="6689725" y="551180"/>
             <a:ext cx="2193925" cy="208280"/>
           </a:xfrm>
-          <a:prstGeom prst="rect"/>
+          <a:prstGeom prst="rect">
+            <a:avLst/>
+          </a:prstGeom>
           <a:noFill/>
           <a:ln cap="flat" cmpd="sng">
             <a:prstDash/>
           </a:ln>
         </p:spPr>
         <p:txBody>
-          <a:bodyPr wrap="square" lIns="91440" tIns="45720" rIns="91440" bIns="45720" numCol="1" vert="horz" anchor="ctr">
+          <a:bodyPr vert="horz" wrap="square" lIns="91440" tIns="45720" rIns="91440" bIns="45720" numCol="1" anchor="ctr">
             <a:noAutofit/>
           </a:bodyPr>
           <a:lstStyle/>
@@ -17913,29 +17739,7 @@
                 <a:ea typeface="맑은 고딕" charset="0"/>
                 <a:cs typeface="Arial Black" charset="0"/>
               </a:rPr>
-              <a:t>▼ </a:t>
-            </a:r>
-            <a:r>
-              <a:rPr lang="ko-KR" sz="800" b="1">
-                <a:solidFill>
-                  <a:schemeClr val="bg1"/>
-                </a:solidFill>
-                <a:latin typeface="맑은 고딕" charset="0"/>
-                <a:ea typeface="맑은 고딕" charset="0"/>
-                <a:cs typeface="Arial Black" charset="0"/>
-              </a:rPr>
-              <a:t>분석 </a:t>
-            </a:r>
-            <a:r>
-              <a:rPr lang="ko-KR" sz="800" b="1">
-                <a:solidFill>
-                  <a:schemeClr val="bg1"/>
-                </a:solidFill>
-                <a:latin typeface="맑은 고딕" charset="0"/>
-                <a:ea typeface="맑은 고딕" charset="0"/>
-                <a:cs typeface="Arial Black" charset="0"/>
-              </a:rPr>
-              <a:t>결과 시각화</a:t>
+              <a:t>▼ 분석 결과 시각화</a:t>
             </a:r>
             <a:endParaRPr lang="ko-KR" altLang="en-US" sz="800" b="1">
               <a:solidFill>
@@ -17953,11 +17757,11 @@
   <p:clrMapOvr>
     <a:masterClrMapping/>
   </p:clrMapOvr>
-  <mc:AlternateContent xmlns:mc="http://schemas.openxmlformats.org/markup-compatibility/2006">
-    <mc:Choice xmlns:p14="http://schemas.microsoft.com/office/powerpoint/2010/main" Requires="p14">
+  <mc:AlternateContent xmlns:mc="http://schemas.openxmlformats.org/markup-compatibility/2006" xmlns:p14="http://schemas.microsoft.com/office/powerpoint/2010/main">
+    <mc:Choice Requires="p14">
       <p:transition spd="slow" p14:dur="2000"/>
     </mc:Choice>
-    <mc:Fallback>
+    <mc:Fallback xmlns="">
       <p:transition spd="slow"/>
     </mc:Fallback>
   </mc:AlternateContent>
@@ -17979,6 +17783,7 @@
         <a:solidFill>
           <a:srgbClr val="F2F2F2"/>
         </a:solidFill>
+        <a:effectLst/>
       </p:bgPr>
     </p:bg>
     <p:spTree>
@@ -18261,7 +18066,7 @@
           <a:bodyPr wrap="square" rtlCol="0" anchor="ctr"/>
           <a:lstStyle/>
           <a:p>
-            <a:pPr algn="ctr" indent="0" marL="0">
+            <a:pPr marL="0" indent="0" algn="ctr">
               <a:buNone/>
             </a:pPr>
             <a:r>
@@ -18300,7 +18105,7 @@
           <a:bodyPr wrap="square" rtlCol="0" anchor="ctr"/>
           <a:lstStyle/>
           <a:p>
-            <a:pPr algn="l" indent="0" marL="0">
+            <a:pPr marL="0" indent="0" algn="l">
               <a:buNone/>
             </a:pPr>
             <a:r>
@@ -18339,7 +18144,7 @@
           <a:bodyPr wrap="square" rtlCol="0" anchor="ctr"/>
           <a:lstStyle/>
           <a:p>
-            <a:pPr algn="l" indent="0" marL="0">
+            <a:pPr marL="0" indent="0" algn="l">
               <a:buNone/>
             </a:pPr>
             <a:r>
@@ -18403,7 +18208,7 @@
           <a:bodyPr wrap="square" rtlCol="0" anchor="ctr"/>
           <a:lstStyle/>
           <a:p>
-            <a:pPr algn="l" indent="0" marL="0">
+            <a:pPr marL="0" indent="0" algn="l">
               <a:buNone/>
             </a:pPr>
             <a:r>
@@ -18465,7 +18270,7 @@
           <a:bodyPr wrap="square" rtlCol="0" anchor="ctr"/>
           <a:lstStyle/>
           <a:p>
-            <a:pPr algn="l" marL="342900" indent="-342900">
+            <a:pPr marL="342900" indent="-342900" algn="l">
               <a:buSzPct val="100000"/>
               <a:buChar char="•"/>
             </a:pPr>
@@ -18483,7 +18288,7 @@
             <a:endParaRPr lang="en-US" sz="1050" dirty="0"/>
           </a:p>
           <a:p>
-            <a:pPr algn="l" marL="342900" indent="-342900">
+            <a:pPr marL="342900" indent="-342900" algn="l">
               <a:buSzPct val="100000"/>
               <a:buChar char="•"/>
             </a:pPr>
@@ -18501,7 +18306,7 @@
             <a:endParaRPr lang="en-US" sz="1050" dirty="0"/>
           </a:p>
           <a:p>
-            <a:pPr algn="l" marL="342900" indent="-342900">
+            <a:pPr marL="342900" indent="-342900" algn="l">
               <a:buSzPct val="100000"/>
               <a:buChar char="•"/>
             </a:pPr>
@@ -18566,7 +18371,7 @@
           <a:bodyPr wrap="square" rtlCol="0" anchor="ctr"/>
           <a:lstStyle/>
           <a:p>
-            <a:pPr algn="ctr" indent="0" marL="0">
+            <a:pPr marL="0" indent="0" algn="ctr">
               <a:buNone/>
             </a:pPr>
             <a:r>
@@ -18630,7 +18435,7 @@
           <a:bodyPr wrap="square" rtlCol="0" anchor="ctr"/>
           <a:lstStyle/>
           <a:p>
-            <a:pPr algn="l" indent="0" marL="0">
+            <a:pPr marL="0" indent="0" algn="l">
               <a:buNone/>
             </a:pPr>
             <a:r>
@@ -18692,7 +18497,7 @@
           <a:bodyPr wrap="square" rtlCol="0" anchor="ctr"/>
           <a:lstStyle/>
           <a:p>
-            <a:pPr algn="l" marL="342900" indent="-342900">
+            <a:pPr marL="342900" indent="-342900" algn="l">
               <a:buSzPct val="100000"/>
               <a:buChar char="•"/>
             </a:pPr>
@@ -18710,7 +18515,7 @@
             <a:endParaRPr lang="en-US" sz="1050" dirty="0"/>
           </a:p>
           <a:p>
-            <a:pPr algn="l" marL="342900" indent="-342900">
+            <a:pPr marL="342900" indent="-342900" algn="l">
               <a:buSzPct val="100000"/>
               <a:buChar char="•"/>
             </a:pPr>
@@ -18728,7 +18533,7 @@
             <a:endParaRPr lang="en-US" sz="1050" dirty="0"/>
           </a:p>
           <a:p>
-            <a:pPr algn="l" marL="342900" indent="-342900">
+            <a:pPr marL="342900" indent="-342900" algn="l">
               <a:buSzPct val="100000"/>
               <a:buChar char="•"/>
             </a:pPr>
@@ -18793,7 +18598,7 @@
           <a:bodyPr wrap="square" rtlCol="0" anchor="ctr"/>
           <a:lstStyle/>
           <a:p>
-            <a:pPr algn="ctr" indent="0" marL="0">
+            <a:pPr marL="0" indent="0" algn="ctr">
               <a:buNone/>
             </a:pPr>
             <a:r>
@@ -18857,7 +18662,7 @@
           <a:bodyPr wrap="square" rtlCol="0" anchor="ctr"/>
           <a:lstStyle/>
           <a:p>
-            <a:pPr algn="ctr" indent="0" marL="0">
+            <a:pPr marL="0" indent="0" algn="ctr">
               <a:buNone/>
             </a:pPr>
             <a:r>
@@ -18896,7 +18701,7 @@
           <a:bodyPr wrap="square" rtlCol="0" anchor="ctr"/>
           <a:lstStyle/>
           <a:p>
-            <a:pPr algn="ctr" indent="0" marL="0">
+            <a:pPr marL="0" indent="0" algn="ctr">
               <a:buNone/>
             </a:pPr>
             <a:r>
@@ -18935,7 +18740,7 @@
           <a:bodyPr wrap="square" rtlCol="0" anchor="ctr"/>
           <a:lstStyle/>
           <a:p>
-            <a:pPr algn="ctr" indent="0" marL="0">
+            <a:pPr marL="0" indent="0" algn="ctr">
               <a:buNone/>
             </a:pPr>
             <a:r>
@@ -18999,7 +18804,7 @@
           <a:bodyPr wrap="square" rtlCol="0" anchor="ctr"/>
           <a:lstStyle/>
           <a:p>
-            <a:pPr algn="ctr" indent="0" marL="0">
+            <a:pPr marL="0" indent="0" algn="ctr">
               <a:buNone/>
             </a:pPr>
             <a:r>
@@ -19038,7 +18843,7 @@
           <a:bodyPr wrap="square" rtlCol="0" anchor="ctr"/>
           <a:lstStyle/>
           <a:p>
-            <a:pPr algn="ctr" indent="0" marL="0">
+            <a:pPr marL="0" indent="0" algn="ctr">
               <a:buNone/>
             </a:pPr>
             <a:r>
@@ -19077,7 +18882,7 @@
           <a:bodyPr wrap="square" rtlCol="0" anchor="ctr"/>
           <a:lstStyle/>
           <a:p>
-            <a:pPr algn="ctr" indent="0" marL="0">
+            <a:pPr marL="0" indent="0" algn="ctr">
               <a:buNone/>
             </a:pPr>
             <a:r>
@@ -19141,7 +18946,7 @@
           <a:bodyPr wrap="square" rtlCol="0" anchor="ctr"/>
           <a:lstStyle/>
           <a:p>
-            <a:pPr algn="ctr" indent="0" marL="0">
+            <a:pPr marL="0" indent="0" algn="ctr">
               <a:buNone/>
             </a:pPr>
             <a:r>
@@ -19180,7 +18985,7 @@
           <a:bodyPr wrap="square" rtlCol="0" anchor="ctr"/>
           <a:lstStyle/>
           <a:p>
-            <a:pPr algn="ctr" indent="0" marL="0">
+            <a:pPr marL="0" indent="0" algn="ctr">
               <a:buNone/>
             </a:pPr>
             <a:r>
@@ -19219,7 +19024,7 @@
           <a:bodyPr wrap="square" rtlCol="0" anchor="ctr"/>
           <a:lstStyle/>
           <a:p>
-            <a:pPr algn="ctr" indent="0" marL="0">
+            <a:pPr marL="0" indent="0" algn="ctr">
               <a:buNone/>
             </a:pPr>
             <a:r>
@@ -19283,7 +19088,7 @@
           <a:bodyPr wrap="square" rtlCol="0" anchor="ctr"/>
           <a:lstStyle/>
           <a:p>
-            <a:pPr algn="ctr" indent="0" marL="0">
+            <a:pPr marL="0" indent="0" algn="ctr">
               <a:buNone/>
             </a:pPr>
             <a:r>
@@ -19322,7 +19127,7 @@
           <a:bodyPr wrap="square" rtlCol="0" anchor="ctr"/>
           <a:lstStyle/>
           <a:p>
-            <a:pPr algn="ctr" indent="0" marL="0">
+            <a:pPr marL="0" indent="0" algn="ctr">
               <a:buNone/>
             </a:pPr>
             <a:r>
@@ -19361,7 +19166,7 @@
           <a:bodyPr wrap="square" rtlCol="0" anchor="ctr"/>
           <a:lstStyle/>
           <a:p>
-            <a:pPr algn="ctr" indent="0" marL="0">
+            <a:pPr marL="0" indent="0" algn="ctr">
               <a:buNone/>
             </a:pPr>
             <a:r>

--- a/doc/Ragas 평가/인공지능서비스개발_10조_Ragas.pptx
+++ b/doc/Ragas 평가/인공지능서비스개발_10조_Ragas.pptx
@@ -1964,7 +1964,7 @@
               <a:t> </a:t>
             </a:r>
             <a:r>
-              <a:rPr lang="en-US" sz="2600" b="1" smtClean="0">
+              <a:rPr lang="en-US" sz="2600" b="1" dirty="0" err="1" smtClean="0">
                 <a:solidFill>
                   <a:srgbClr val="FFFFFF"/>
                 </a:solidFill>
